--- a/presentation/LoanWhiz-Presentation.pptx
+++ b/presentation/LoanWhiz-Presentation.pptx
@@ -5281,7 +5281,7 @@
                 </a:solidFill>
                 <a:latin typeface="Calibri"/>
               </a:rPr>
-              <a:t>Open &amp; extensible</a:t>
+              <a:t>Data-agnostic &amp; extensible</a:t>
             </a:r>
             <a:r>
               <a:rPr sz="1350" b="0" i="0">
@@ -5290,7 +5290,7 @@
                 </a:solidFill>
                 <a:latin typeface="Calibri"/>
               </a:rPr>
-              <a:t> — Apache-2.0, config-driven multi-deal, add a primitive in a few lines.</a:t>
+              <a:t> — Apache-2.0; add a deal via data/deals.json (no code change), add a primitive in a few lines.</a:t>
             </a:r>
           </a:p>
         </p:txBody>
@@ -9214,7 +9214,7 @@
                 </a:solidFill>
                 <a:latin typeface="Calibri"/>
               </a:rPr>
-              <a:t>Docling extraction (prospectus → JSON)   ·   deeploans ETL / ESMA tape ingestion   ·   HuggingFace: Algoritmica/green-lion-2026</a:t>
+              <a:t>Docling extraction (prospectus → JSON)   ·   deeploans ETL / ESMA tape ingestion   ·   HuggingFace: green-lion-2026 + green-lion-2024-2025 (27-month history)</a:t>
             </a:r>
           </a:p>
         </p:txBody>
@@ -16959,7 +16959,7 @@
                 </a:solidFill>
                 <a:latin typeface="Calibri"/>
               </a:rPr>
-              <a:t>A complete synthetic Dutch RMBS released for the hackathon: prospectus + 3 monthly ESMA tapes + 3 investor reports.</a:t>
+              <a:t>A complete synthetic Dutch RMBS released for the hackathon: prospectus + 27 months of ESMA tapes (2024–2026) + 3 investor reports.</a:t>
             </a:r>
           </a:p>
         </p:txBody>
@@ -17059,7 +17059,7 @@
                 </a:solidFill>
                 <a:latin typeface="Calibri"/>
               </a:rPr>
-              <a:t>3</a:t>
+              <a:t>27</a:t>
             </a:r>
           </a:p>
         </p:txBody>
@@ -17104,7 +17104,7 @@
                 </a:solidFill>
                 <a:latin typeface="Calibri"/>
               </a:rPr>
-              <a:t>note tranches</a:t>
+              <a:t>monthly tapes</a:t>
             </a:r>
           </a:p>
         </p:txBody>
@@ -17149,7 +17149,7 @@
                 </a:solidFill>
                 <a:latin typeface="Calibri"/>
               </a:rPr>
-              <a:t>Class A (AAA) / B / C, with sizes &amp; subordination</a:t>
+              <a:t>Jan 2024 – Apr 2026 ESMA history (Jan-2026 gap)</a:t>
             </a:r>
           </a:p>
         </p:txBody>
@@ -18123,7 +18123,7 @@
                 </a:solidFill>
                 <a:latin typeface="Calibri"/>
               </a:rPr>
-              <a:t>Built to scale to more data</a:t>
+              <a:t>Data-agnostic by design</a:t>
             </a:r>
           </a:p>
         </p:txBody>
@@ -18177,7 +18177,7 @@
                 </a:solidFill>
                 <a:latin typeface="Calibri"/>
               </a:rPr>
-              <a:t>Config-driven multi-deal registry — add a deal as a dict, no code change.</a:t>
+              <a:t>Add a deal via data/deals.json — no code change; Green-Lion defaults fill the gaps.</a:t>
             </a:r>
           </a:p>
           <a:p>
@@ -18208,7 +18208,7 @@
                 </a:solidFill>
                 <a:latin typeface="Calibri"/>
               </a:rPr>
-              <a:t>Durable cache: extract once, then instant; copes with 4yr of monthly tapes.</a:t>
+              <a:t>Proven over 27 months of monthly tapes (2024–2026), not a single snapshot.</a:t>
             </a:r>
           </a:p>
           <a:p>
@@ -18239,7 +18239,7 @@
                 </a:solidFill>
                 <a:latin typeface="Calibri"/>
               </a:rPr>
-              <a:t>Cache lifecycle hardened so a cold rebuild never serves stale results.</a:t>
+              <a:t>Durable cache: extract once, then instant; deal-context keys resolve per deal.</a:t>
             </a:r>
           </a:p>
         </p:txBody>

--- a/presentation/LoanWhiz-Presentation.pptx
+++ b/presentation/LoanWhiz-Presentation.pptx
@@ -5290,7 +5290,7 @@
                 </a:solidFill>
                 <a:latin typeface="Calibri"/>
               </a:rPr>
-              <a:t> — Apache-2.0; add a deal via data/deals.json (no code change), add a primitive in a few lines.</a:t>
+              <a:t> — Apache-2.0; add a deal via data/deals.json (no code change), CSV or parquet tapes, add a primitive in a few lines.</a:t>
             </a:r>
           </a:p>
         </p:txBody>
@@ -18208,7 +18208,7 @@
                 </a:solidFill>
                 <a:latin typeface="Calibri"/>
               </a:rPr>
-              <a:t>Proven over 27 months of monthly tapes (2024–2026), not a single snapshot.</a:t>
+              <a:t>Format-agnostic tapes: CSV or parquet (incl. a combined multi-month file), 27 months proven.</a:t>
             </a:r>
           </a:p>
           <a:p>
@@ -18239,7 +18239,7 @@
                 </a:solidFill>
                 <a:latin typeface="Calibri"/>
               </a:rPr>
-              <a:t>Durable cache: extract once, then instant; deal-context keys resolve per deal.</a:t>
+              <a:t>Per-deal keys resolve from context (capital structure, pool balance, triggers); cached.</a:t>
             </a:r>
           </a:p>
         </p:txBody>

--- a/presentation/LoanWhiz-Presentation.pptx
+++ b/presentation/LoanWhiz-Presentation.pptx
@@ -5281,7 +5281,7 @@
                 </a:solidFill>
                 <a:latin typeface="Calibri"/>
               </a:rPr>
-              <a:t>Data-agnostic &amp; extensible</a:t>
+              <a:t>Data-driven &amp; extensible</a:t>
             </a:r>
             <a:r>
               <a:rPr sz="1350" b="0" i="0">
@@ -5290,7 +5290,7 @@
                 </a:solidFill>
                 <a:latin typeface="Calibri"/>
               </a:rPr>
-              <a:t> — Apache-2.0; add a deal via data/deals.json (no code change), CSV or parquet tapes, add a primitive in a few lines.</a:t>
+              <a:t> — Apache-2.0; add a deal via data/deals.json (no code change), CSV or parquet tapes, add a primitive in a few lines. Demonstrated on Green Lion 2026-1; multi-deal validation underway.</a:t>
             </a:r>
           </a:p>
         </p:txBody>
@@ -11533,7 +11533,7 @@
                 </a:solidFill>
                 <a:latin typeface="Calibri"/>
               </a:rPr>
-              <a:t>Confidence = coverage · cross-ref resolution · LLM self-score.</a:t>
+              <a:t>Confidence is a real coverage metric — sections resolved / steps with a recipient.</a:t>
             </a:r>
           </a:p>
           <a:p>
@@ -13103,7 +13103,7 @@
                 </a:solidFill>
                 <a:latin typeface="Calibri"/>
               </a:rPr>
-              <a:t>Reconcile computed distributions against investor-report actuals; flag discrepancies.</a:t>
+              <a:t>Reconcile reconstructed collateral against the investor reports to the cent; flag discrepancies.</a:t>
             </a:r>
           </a:p>
         </p:txBody>
@@ -13294,7 +13294,7 @@
                 </a:solidFill>
                 <a:latin typeface="Calibri"/>
               </a:rPr>
-              <a:t>Project 12-month cashflows under base and stress scenarios; Class-A WAL.</a:t>
+              <a:t>Single-period stress sensitivity: re-run the waterfall under base/stress collection factors; Class-A WAL.</a:t>
             </a:r>
           </a:p>
         </p:txBody>
@@ -14256,7 +14256,7 @@
                 </a:solidFill>
                 <a:latin typeface="Calibri"/>
               </a:rPr>
-              <a:t>Mandatory on every primitive — coverage · cross-ref resolution · LLM self-assessment.</a:t>
+              <a:t>Real coverage metric per primitive; agent answers aggregate it as min(per-tool confidence).</a:t>
             </a:r>
           </a:p>
         </p:txBody>
@@ -16771,7 +16771,7 @@
                 </a:solidFill>
                 <a:latin typeface="Calibri"/>
               </a:rPr>
-              <a:t>Proven on Green Lion 2026-1</a:t>
+              <a:t>Demonstrated on Green Lion 2026-1</a:t>
             </a:r>
           </a:p>
         </p:txBody>
@@ -16959,7 +16959,7 @@
                 </a:solidFill>
                 <a:latin typeface="Calibri"/>
               </a:rPr>
-              <a:t>A complete synthetic Dutch RMBS released for the hackathon: prospectus + 27 months of ESMA tapes (2024–2026) + 3 investor reports.</a:t>
+              <a:t>A synthetic Dutch RMBS released for the hackathon: prospectus + 27 monthly ESMA tape snapshots (2024–2026) + 3 investor reports.</a:t>
             </a:r>
           </a:p>
         </p:txBody>
@@ -17149,7 +17149,7 @@
                 </a:solidFill>
                 <a:latin typeface="Calibri"/>
               </a:rPr>
-              <a:t>Jan 2024 – Apr 2026 ESMA history (Jan-2026 gap)</a:t>
+              <a:t>Synthetic snapshots, Jan 2024 – Apr 2026 (Jan-2026 gap)</a:t>
             </a:r>
           </a:p>
         </p:txBody>
@@ -17902,7 +17902,7 @@
               </a:spcAft>
             </a:pPr>
             <a:r>
-              <a:rPr sz="1250" b="1" i="0">
+              <a:rPr sz="1200" b="1" i="0">
                 <a:solidFill>
                   <a:srgbClr val="129E8F"/>
                 </a:solidFill>
@@ -17911,13 +17911,13 @@
               <a:t>▸  </a:t>
             </a:r>
             <a:r>
-              <a:rPr sz="1250" b="0" i="0">
+              <a:rPr sz="1200" b="0" i="0">
                 <a:solidFill>
                   <a:srgbClr val="536177"/>
                 </a:solidFill>
                 <a:latin typeface="Calibri"/>
               </a:rPr>
-              <a:t>Prospectus → deal model → waterfall execution → reconciliation runs clean.</a:t>
+              <a:t>Prospectus → extracted model → model-driven waterfall → multi-period state.</a:t>
             </a:r>
           </a:p>
           <a:p>
@@ -17933,7 +17933,7 @@
               </a:spcAft>
             </a:pPr>
             <a:r>
-              <a:rPr sz="1250" b="1" i="0">
+              <a:rPr sz="1200" b="1" i="0">
                 <a:solidFill>
                   <a:srgbClr val="129E8F"/>
                 </a:solidFill>
@@ -17942,13 +17942,13 @@
               <a:t>▸  </a:t>
             </a:r>
             <a:r>
-              <a:rPr sz="1250" b="0" i="0">
+              <a:rPr sz="1200" b="0" i="0">
                 <a:solidFill>
                   <a:srgbClr val="536177"/>
                 </a:solidFill>
                 <a:latin typeface="Calibri"/>
               </a:rPr>
-              <a:t>Confidence 0.75 with every tranche, step and trigger source-cited.</a:t>
+              <a:t>Collateral reconciles to the investor reports to the cent; liabilities reconstructed from the prospectus + invariant-validated.</a:t>
             </a:r>
           </a:p>
           <a:p>
@@ -17964,7 +17964,7 @@
               </a:spcAft>
             </a:pPr>
             <a:r>
-              <a:rPr sz="1250" b="1" i="0">
+              <a:rPr sz="1200" b="1" i="0">
                 <a:solidFill>
                   <a:srgbClr val="129E8F"/>
                 </a:solidFill>
@@ -17973,13 +17973,13 @@
               <a:t>▸  </a:t>
             </a:r>
             <a:r>
-              <a:rPr sz="1250" b="0" i="0">
+              <a:rPr sz="1200" b="0" i="0">
                 <a:solidFill>
                   <a:srgbClr val="536177"/>
                 </a:solidFill>
                 <a:latin typeface="Calibri"/>
               </a:rPr>
-              <a:t>Chat answers grounded numbers (e.g. pool balance €1.03bn) live.</a:t>
+              <a:t>Chat answers grounded numbers (e.g. pool balance ~€1bn) live.</a:t>
             </a:r>
           </a:p>
         </p:txBody>
@@ -18123,7 +18123,7 @@
                 </a:solidFill>
                 <a:latin typeface="Calibri"/>
               </a:rPr>
-              <a:t>Data-agnostic by design</a:t>
+              <a:t>Data-driven by design</a:t>
             </a:r>
           </a:p>
         </p:txBody>
@@ -18162,7 +18162,7 @@
               </a:spcAft>
             </a:pPr>
             <a:r>
-              <a:rPr sz="1250" b="1" i="0">
+              <a:rPr sz="1200" b="1" i="0">
                 <a:solidFill>
                   <a:srgbClr val="129E8F"/>
                 </a:solidFill>
@@ -18171,13 +18171,13 @@
               <a:t>▸  </a:t>
             </a:r>
             <a:r>
-              <a:rPr sz="1250" b="0" i="0">
+              <a:rPr sz="1200" b="0" i="0">
                 <a:solidFill>
                   <a:srgbClr val="536177"/>
                 </a:solidFill>
                 <a:latin typeface="Calibri"/>
               </a:rPr>
-              <a:t>Add a deal via data/deals.json — no code change; Green-Lion defaults fill the gaps.</a:t>
+              <a:t>Add a deal via data/deals.json — no code change; the interpreter executes its extracted model.</a:t>
             </a:r>
           </a:p>
           <a:p>
@@ -18193,7 +18193,7 @@
               </a:spcAft>
             </a:pPr>
             <a:r>
-              <a:rPr sz="1250" b="1" i="0">
+              <a:rPr sz="1200" b="1" i="0">
                 <a:solidFill>
                   <a:srgbClr val="129E8F"/>
                 </a:solidFill>
@@ -18202,13 +18202,13 @@
               <a:t>▸  </a:t>
             </a:r>
             <a:r>
-              <a:rPr sz="1250" b="0" i="0">
+              <a:rPr sz="1200" b="0" i="0">
                 <a:solidFill>
                   <a:srgbClr val="536177"/>
                 </a:solidFill>
                 <a:latin typeface="Calibri"/>
               </a:rPr>
-              <a:t>Format-agnostic tapes: CSV or parquet (incl. a combined multi-month file), 27 months proven.</a:t>
+              <a:t>Format-agnostic tapes: CSV or parquet (incl. a combined multi-month file).</a:t>
             </a:r>
           </a:p>
           <a:p>
@@ -18224,7 +18224,7 @@
               </a:spcAft>
             </a:pPr>
             <a:r>
-              <a:rPr sz="1250" b="1" i="0">
+              <a:rPr sz="1200" b="1" i="0">
                 <a:solidFill>
                   <a:srgbClr val="129E8F"/>
                 </a:solidFill>
@@ -18233,13 +18233,13 @@
               <a:t>▸  </a:t>
             </a:r>
             <a:r>
-              <a:rPr sz="1250" b="0" i="0">
+              <a:rPr sz="1200" b="0" i="0">
                 <a:solidFill>
                   <a:srgbClr val="536177"/>
                 </a:solidFill>
                 <a:latin typeface="Calibri"/>
               </a:rPr>
-              <a:t>Per-deal keys resolve from context (capital structure, pool balance, triggers); cached.</a:t>
+              <a:t>Validated on Green Lion 2026-1; real multi-deal validation underway (#206).</a:t>
             </a:r>
           </a:p>
         </p:txBody>

--- a/presentation/LoanWhiz-Presentation.pptx
+++ b/presentation/LoanWhiz-Presentation.pptx
@@ -14,9 +14,10 @@
     <p:sldId id="262" r:id="rId8"/>
     <p:sldId id="263" r:id="rId9"/>
     <p:sldId id="264" r:id="rId10"/>
+    <p:sldId id="265" r:id="rId11"/>
   </p:sldIdLst>
   <p:notesMasterIdLst>
-    <p:notesMasterId r:id="rId11"/>
+    <p:notesMasterId r:id="rId12"/>
   </p:notesMasterIdLst>
   <p:sldSz cx="12191695" cy="6858000"/>
   <p:notesSz cx="6858000" cy="12191695"/>
@@ -534,6 +535,94 @@
             <a:fld id="{F7021451-1387-4CA6-816F-3879F97B5CBC}" type="slidenum">
               <a:rPr lang="en-US"/>
               <a:t>1</a:t>
+            </a:fld>
+            <a:endParaRPr lang="en-US"/>
+          </a:p>
+        </p:txBody>
+      </p:sp>
+    </p:spTree>
+    <p:extLst>
+      <p:ext uri="{BB962C8B-B14F-4D97-AF65-F5344CB8AC3E}">
+        <p14:creationId xmlns:p14="http://schemas.microsoft.com/office/powerpoint/2010/main" val="1024086991"/>
+      </p:ext>
+    </p:extLst>
+  </p:cSld>
+  <p:clrMapOvr>
+    <a:masterClrMapping/>
+  </p:clrMapOvr>
+</p:notes>
+</file>
+
+<file path=ppt/notesSlides/notesSlide10.xml><?xml version="1.0" encoding="utf-8"?>
+<p:notes xmlns:a="http://schemas.openxmlformats.org/drawingml/2006/main" xmlns:r="http://schemas.openxmlformats.org/officeDocument/2006/relationships" xmlns:p="http://schemas.openxmlformats.org/presentationml/2006/main">
+  <p:cSld>
+    <p:spTree>
+      <p:nvGrpSpPr>
+        <p:cNvPr id="1" name=""/>
+        <p:cNvGrpSpPr/>
+        <p:nvPr/>
+      </p:nvGrpSpPr>
+      <p:grpSpPr>
+        <a:xfrm>
+          <a:off x="0" y="0"/>
+          <a:ext cx="0" cy="0"/>
+          <a:chOff x="0" y="0"/>
+          <a:chExt cx="0" cy="0"/>
+        </a:xfrm>
+      </p:grpSpPr>
+      <p:sp>
+        <p:nvSpPr>
+          <p:cNvPr id="2" name="Slide Image Placeholder 1"/>
+          <p:cNvSpPr>
+            <a:spLocks noGrp="1" noRot="1" noChangeAspect="1"/>
+          </p:cNvSpPr>
+          <p:nvPr>
+            <p:ph type="sldImg"/>
+          </p:nvPr>
+        </p:nvSpPr>
+        <p:spPr/>
+      </p:sp>
+      <p:sp>
+        <p:nvSpPr>
+          <p:cNvPr id="3" name="Notes Placeholder 2"/>
+          <p:cNvSpPr>
+            <a:spLocks noGrp="1"/>
+          </p:cNvSpPr>
+          <p:nvPr>
+            <p:ph type="body" idx="1"/>
+          </p:nvPr>
+        </p:nvSpPr>
+        <p:spPr/>
+        <p:txBody>
+          <a:bodyPr/>
+          <a:lstStyle/>
+          <a:p>
+            <a:r>
+              <a:rPr lang="en-US" dirty="0"/>
+              <a:t/>
+            </a:r>
+            <a:endParaRPr lang="en-US" dirty="0"/>
+          </a:p>
+        </p:txBody>
+      </p:sp>
+      <p:sp>
+        <p:nvSpPr>
+          <p:cNvPr id="4" name="Slide Number Placeholder 3"/>
+          <p:cNvSpPr>
+            <a:spLocks noGrp="1"/>
+          </p:cNvSpPr>
+          <p:nvPr>
+            <p:ph type="sldNum" sz="quarter" idx="10"/>
+          </p:nvPr>
+        </p:nvSpPr>
+        <p:spPr/>
+        <p:txBody>
+          <a:bodyPr/>
+          <a:lstStyle/>
+          <a:p>
+            <a:fld id="{F7021451-1387-4CA6-816F-3879F97B5CBC}" type="slidenum">
+              <a:rPr lang="en-US"/>
+              <a:t>10</a:t>
             </a:fld>
             <a:endParaRPr lang="en-US"/>
           </a:p>
@@ -2047,6 +2136,184 @@
 </p:sld>
 </file>
 
+<file path=ppt/slides/slide10.xml><?xml version="1.0" encoding="utf-8"?>
+<p:sld xmlns:a="http://schemas.openxmlformats.org/drawingml/2006/main" xmlns:r="http://schemas.openxmlformats.org/officeDocument/2006/relationships" xmlns:p="http://schemas.openxmlformats.org/presentationml/2006/main">
+  <p:cSld name="Slide 10">
+    <p:bg>
+      <p:bgPr>
+        <a:solidFill>
+          <a:srgbClr val="1B2A4A"/>
+        </a:solidFill>
+      </p:bgPr>
+    </p:bg>
+    <p:spTree>
+      <p:nvGrpSpPr>
+        <p:cNvPr id="1" name=""/>
+        <p:cNvGrpSpPr/>
+        <p:nvPr/>
+      </p:nvGrpSpPr>
+      <p:grpSpPr>
+        <a:xfrm>
+          <a:off x="0" y="0"/>
+          <a:ext cx="0" cy="0"/>
+          <a:chOff x="0" y="0"/>
+          <a:chExt cx="0" cy="0"/>
+        </a:xfrm>
+      </p:grpSpPr>
+      <p:sp>
+        <p:nvSpPr>
+          <p:cNvPr id="2" name="Shape 0"/>
+          <p:cNvSpPr/>
+          <p:nvPr/>
+        </p:nvSpPr>
+        <p:spPr>
+          <a:xfrm>
+            <a:off x="0" y="0"/>
+            <a:ext cx="164592" cy="6858000"/>
+          </a:xfrm>
+          <a:prstGeom prst="rect">
+            <a:avLst/>
+          </a:prstGeom>
+          <a:solidFill>
+            <a:srgbClr val="129E8F"/>
+          </a:solidFill>
+          <a:ln/>
+        </p:spPr>
+      </p:sp>
+      <p:sp>
+        <p:nvSpPr>
+          <p:cNvPr id="3" name="Text 1"/>
+          <p:cNvSpPr/>
+          <p:nvPr/>
+        </p:nvSpPr>
+        <p:spPr>
+          <a:xfrm>
+            <a:off x="868680" y="2468880"/>
+            <a:ext cx="10058400" cy="365760"/>
+          </a:xfrm>
+          <a:prstGeom prst="rect">
+            <a:avLst/>
+          </a:prstGeom>
+          <a:noFill/>
+          <a:ln/>
+        </p:spPr>
+        <p:txBody>
+          <a:bodyPr wrap="square" lIns="0" tIns="0" rIns="0" bIns="0" rtlCol="0" anchor="t"/>
+          <a:lstStyle/>
+          <a:p>
+            <a:pPr algn="l" indent="0" marL="0">
+              <a:lnSpc>
+                <a:spcPct val="100000"/>
+              </a:lnSpc>
+              <a:buNone/>
+            </a:pPr>
+            <a:r>
+              <a:rPr lang="en-US" sz="1300" b="1" dirty="0">
+                <a:solidFill>
+                  <a:srgbClr val="129E8F"/>
+                </a:solidFill>
+                <a:latin typeface="Calibri" pitchFamily="34" charset="0"/>
+                <a:ea typeface="Calibri" pitchFamily="34" charset="-122"/>
+                <a:cs typeface="Calibri" pitchFamily="34" charset="-120"/>
+              </a:rPr>
+              <a:t>WHY IT ANSWERS THE CHALLENGE</a:t>
+            </a:r>
+            <a:endParaRPr lang="en-US" sz="1300" dirty="0"/>
+          </a:p>
+        </p:txBody>
+      </p:sp>
+      <p:sp>
+        <p:nvSpPr>
+          <p:cNvPr id="4" name="Text 2"/>
+          <p:cNvSpPr/>
+          <p:nvPr/>
+        </p:nvSpPr>
+        <p:spPr>
+          <a:xfrm>
+            <a:off x="841248" y="2880360"/>
+            <a:ext cx="10424160" cy="1097280"/>
+          </a:xfrm>
+          <a:prstGeom prst="rect">
+            <a:avLst/>
+          </a:prstGeom>
+          <a:noFill/>
+          <a:ln/>
+        </p:spPr>
+        <p:txBody>
+          <a:bodyPr wrap="square" lIns="0" tIns="0" rIns="0" bIns="0" rtlCol="0" anchor="t"/>
+          <a:lstStyle/>
+          <a:p>
+            <a:pPr algn="l" indent="0" marL="0">
+              <a:lnSpc>
+                <a:spcPct val="100000"/>
+              </a:lnSpc>
+              <a:buNone/>
+            </a:pPr>
+            <a:r>
+              <a:rPr lang="en-US" sz="4000" b="1" dirty="0">
+                <a:solidFill>
+                  <a:srgbClr val="FFFFFF"/>
+                </a:solidFill>
+                <a:latin typeface="Calibri" pitchFamily="34" charset="0"/>
+                <a:ea typeface="Calibri" pitchFamily="34" charset="-122"/>
+                <a:cs typeface="Calibri" pitchFamily="34" charset="-120"/>
+              </a:rPr>
+              <a:t>Reusable, trustworthy, broadly applicable</a:t>
+            </a:r>
+            <a:endParaRPr lang="en-US" sz="4000" dirty="0"/>
+          </a:p>
+        </p:txBody>
+      </p:sp>
+      <p:sp>
+        <p:nvSpPr>
+          <p:cNvPr id="5" name="Text 3"/>
+          <p:cNvSpPr/>
+          <p:nvPr/>
+        </p:nvSpPr>
+        <p:spPr>
+          <a:xfrm>
+            <a:off x="868680" y="3977640"/>
+            <a:ext cx="9875520" cy="1097280"/>
+          </a:xfrm>
+          <a:prstGeom prst="rect">
+            <a:avLst/>
+          </a:prstGeom>
+          <a:noFill/>
+          <a:ln/>
+        </p:spPr>
+        <p:txBody>
+          <a:bodyPr wrap="square" lIns="0" tIns="0" rIns="0" bIns="0" rtlCol="0" anchor="t"/>
+          <a:lstStyle/>
+          <a:p>
+            <a:pPr algn="l" indent="0" marL="0">
+              <a:lnSpc>
+                <a:spcPct val="120000"/>
+              </a:lnSpc>
+              <a:buNone/>
+            </a:pPr>
+            <a:r>
+              <a:rPr lang="en-US" sz="1600" dirty="0">
+                <a:solidFill>
+                  <a:srgbClr val="C7D3E8"/>
+                </a:solidFill>
+                <a:latin typeface="Calibri" pitchFamily="34" charset="0"/>
+                <a:ea typeface="Calibri" pitchFamily="34" charset="-122"/>
+                <a:cs typeface="Calibri" pitchFamily="34" charset="-120"/>
+              </a:rPr>
+              <a:t>SF-native primitives + a registry, packaged as an MCP — not a one-off script. Validated to the cent against a real ING deal, demonstrated across Dutch, Italian and Spanish RMBS, with citations, governance and data-provenance on every output. Built on the organiser's own tools — deeploans wired as a selectable ingestion source (we run direct for this demo's infra), FINOS for governance — as real integration points, not name-drops. And honest about its limits — the capability matrix shows exactly what's proven.</a:t>
+            </a:r>
+            <a:endParaRPr lang="en-US" sz="1600" dirty="0"/>
+          </a:p>
+        </p:txBody>
+      </p:sp>
+    </p:spTree>
+  </p:cSld>
+  <p:clrMapOvr>
+    <a:masterClrMapping/>
+  </p:clrMapOvr>
+</p:sld>
+</file>
+
 <file path=ppt/slides/slide2.xml><?xml version="1.0" encoding="utf-8"?>
 <p:sld xmlns:a="http://schemas.openxmlformats.org/drawingml/2006/main" xmlns:r="http://schemas.openxmlformats.org/officeDocument/2006/relationships" xmlns:p="http://schemas.openxmlformats.org/presentationml/2006/main">
   <p:cSld name="Slide 2">
@@ -2332,7 +2599,7 @@
                 <a:ea typeface="Calibri" pitchFamily="34" charset="-122"/>
                 <a:cs typeface="Calibri" pitchFamily="34" charset="-120"/>
               </a:rPr>
-              <a:t>Three concerns a chatbot collapses into one. Read once, execute deterministically, orchestrate with an agent.</a:t>
+              <a:t>The deterministic-primitives + dynamic-orchestration hybrid the brief calls for: read once, execute deterministically, orchestrate with an agent — and keep the LLM out of the maths. We have the agent; we just don't let it do arithmetic.</a:t>
             </a:r>
             <a:endParaRPr lang="en-US" sz="1400" dirty="0"/>
           </a:p>
@@ -3122,7 +3389,7 @@
                 <a:ea typeface="Calibri" pitchFamily="34" charset="-122"/>
                 <a:cs typeface="Calibri" pitchFamily="34" charset="-120"/>
               </a:rPr>
-              <a:t>THE PROOF</a:t>
+              <a:t>THE DYNAMIC ORCHESTRATION LAYER</a:t>
             </a:r>
             <a:endParaRPr lang="en-US" sz="1200" dirty="0"/>
           </a:p>
@@ -3164,7 +3431,7 @@
                 <a:ea typeface="Calibri" pitchFamily="34" charset="-122"/>
                 <a:cs typeface="Calibri" pitchFamily="34" charset="-120"/>
               </a:rPr>
-              <a:t>Validated against a real ING deal — to the cent</a:t>
+              <a:t>The meta-agent loop the brief describes</a:t>
             </a:r>
             <a:endParaRPr lang="en-US" sz="2800" dirty="0"/>
           </a:p>
@@ -3327,7 +3594,7 @@
                 <a:ea typeface="Calibri" pitchFamily="34" charset="-122"/>
                 <a:cs typeface="Calibri" pitchFamily="34" charset="-120"/>
               </a:rPr>
-              <a:t>Green Lion 2024-1: our engine re-runs the deal's own published Notes &amp; Cash waterfall. No report distribution figures fed in — Class A interest is computed (balance × coupon × days/360).</a:t>
+              <a:t>Plan → compose → execute → validate → human-review → answer. The LangGraph agent decides which primitives to call; the primitives do the maths deterministically; governance gates the result.</a:t>
             </a:r>
             <a:endParaRPr lang="en-US" sz="1400" dirty="0"/>
           </a:p>
@@ -3342,11 +3609,11 @@
         <p:spPr>
           <a:xfrm>
             <a:off x="640080" y="2423160"/>
-            <a:ext cx="2583866" cy="1783080"/>
+            <a:ext cx="5364328" cy="1655064"/>
           </a:xfrm>
           <a:prstGeom prst="roundRect">
             <a:avLst>
-              <a:gd name="adj" fmla="val 2564"/>
+              <a:gd name="adj" fmla="val 2762"/>
             </a:avLst>
           </a:prstGeom>
           <a:solidFill>
@@ -3369,14 +3636,34 @@
       </p:sp>
       <p:sp>
         <p:nvSpPr>
-          <p:cNvPr id="10" name="Text 8"/>
-          <p:cNvSpPr/>
-          <p:nvPr/>
-        </p:nvSpPr>
-        <p:spPr>
-          <a:xfrm>
-            <a:off x="640080" y="2606040"/>
-            <a:ext cx="2583866" cy="777240"/>
+          <p:cNvPr id="10" name="Shape 8"/>
+          <p:cNvSpPr/>
+          <p:nvPr/>
+        </p:nvSpPr>
+        <p:spPr>
+          <a:xfrm>
+            <a:off x="640080" y="2423160"/>
+            <a:ext cx="82296" cy="1655064"/>
+          </a:xfrm>
+          <a:prstGeom prst="rect">
+            <a:avLst/>
+          </a:prstGeom>
+          <a:solidFill>
+            <a:srgbClr val="2B59D6"/>
+          </a:solidFill>
+          <a:ln/>
+        </p:spPr>
+      </p:sp>
+      <p:sp>
+        <p:nvSpPr>
+          <p:cNvPr id="11" name="Text 9"/>
+          <p:cNvSpPr/>
+          <p:nvPr/>
+        </p:nvSpPr>
+        <p:spPr>
+          <a:xfrm>
+            <a:off x="896112" y="2624328"/>
+            <a:ext cx="4907128" cy="365760"/>
           </a:xfrm>
           <a:prstGeom prst="rect">
             <a:avLst/>
@@ -3388,37 +3675,37 @@
           <a:bodyPr wrap="square" lIns="0" tIns="0" rIns="0" bIns="0" rtlCol="0" anchor="t"/>
           <a:lstStyle/>
           <a:p>
-            <a:pPr algn="ctr" indent="0" marL="0">
+            <a:pPr algn="l" indent="0" marL="0">
               <a:lnSpc>
                 <a:spcPct val="100000"/>
               </a:lnSpc>
               <a:buNone/>
             </a:pPr>
             <a:r>
-              <a:rPr lang="en-US" sz="4200" b="1" dirty="0">
-                <a:solidFill>
-                  <a:srgbClr val="2B59D6"/>
-                </a:solidFill>
-                <a:latin typeface="Calibri" pitchFamily="34" charset="0"/>
-                <a:ea typeface="Calibri" pitchFamily="34" charset="-122"/>
-                <a:cs typeface="Calibri" pitchFamily="34" charset="-120"/>
-              </a:rPr>
-              <a:t>11/11</a:t>
-            </a:r>
-            <a:endParaRPr lang="en-US" sz="4200" dirty="0"/>
-          </a:p>
-        </p:txBody>
-      </p:sp>
-      <p:sp>
-        <p:nvSpPr>
-          <p:cNvPr id="11" name="Text 9"/>
-          <p:cNvSpPr/>
-          <p:nvPr/>
-        </p:nvSpPr>
-        <p:spPr>
-          <a:xfrm>
-            <a:off x="640080" y="3383280"/>
-            <a:ext cx="2583866" cy="320040"/>
+              <a:rPr lang="en-US" sz="1500" b="1" dirty="0">
+                <a:solidFill>
+                  <a:srgbClr val="1B2A4A"/>
+                </a:solidFill>
+                <a:latin typeface="Calibri" pitchFamily="34" charset="0"/>
+                <a:ea typeface="Calibri" pitchFamily="34" charset="-122"/>
+                <a:cs typeface="Calibri" pitchFamily="34" charset="-120"/>
+              </a:rPr>
+              <a:t>1 · Plan &amp; decompose</a:t>
+            </a:r>
+            <a:endParaRPr lang="en-US" sz="1500" dirty="0"/>
+          </a:p>
+        </p:txBody>
+      </p:sp>
+      <p:sp>
+        <p:nvSpPr>
+          <p:cNvPr id="12" name="Text 10"/>
+          <p:cNvSpPr/>
+          <p:nvPr/>
+        </p:nvSpPr>
+        <p:spPr>
+          <a:xfrm>
+            <a:off x="896112" y="3044952"/>
+            <a:ext cx="4861408" cy="923544"/>
           </a:xfrm>
           <a:prstGeom prst="rect">
             <a:avLst/>
@@ -3430,56 +3717,17 @@
           <a:bodyPr wrap="square" lIns="0" tIns="0" rIns="0" bIns="0" rtlCol="0" anchor="t"/>
           <a:lstStyle/>
           <a:p>
-            <a:pPr algn="ctr" indent="0" marL="0">
-              <a:lnSpc>
-                <a:spcPct val="100000"/>
-              </a:lnSpc>
-              <a:buNone/>
-            </a:pPr>
-            <a:r>
-              <a:rPr lang="en-US" sz="1400" b="1" dirty="0">
-                <a:solidFill>
-                  <a:srgbClr val="1B2A4A"/>
-                </a:solidFill>
-                <a:latin typeface="Calibri" pitchFamily="34" charset="0"/>
-                <a:ea typeface="Calibri" pitchFamily="34" charset="-122"/>
-                <a:cs typeface="Calibri" pitchFamily="34" charset="-120"/>
-              </a:rPr>
-              <a:t>revenue PoP steps</a:t>
-            </a:r>
-            <a:endParaRPr lang="en-US" sz="1400" dirty="0"/>
-          </a:p>
-        </p:txBody>
-      </p:sp>
-      <p:sp>
-        <p:nvSpPr>
-          <p:cNvPr id="12" name="Text 10"/>
-          <p:cNvSpPr/>
-          <p:nvPr/>
-        </p:nvSpPr>
-        <p:spPr>
-          <a:xfrm>
-            <a:off x="804672" y="3703320"/>
-            <a:ext cx="2254682" cy="411480"/>
-          </a:xfrm>
-          <a:prstGeom prst="rect">
-            <a:avLst/>
-          </a:prstGeom>
-          <a:noFill/>
-          <a:ln/>
-        </p:spPr>
-        <p:txBody>
-          <a:bodyPr wrap="square" lIns="0" tIns="0" rIns="0" bIns="0" rtlCol="0" anchor="t"/>
-          <a:lstStyle/>
-          <a:p>
-            <a:pPr algn="ctr" indent="0" marL="0">
-              <a:lnSpc>
-                <a:spcPct val="100000"/>
-              </a:lnSpc>
-              <a:buNone/>
-            </a:pPr>
-            <a:r>
-              <a:rPr lang="en-US" sz="1000" dirty="0">
+            <a:pPr algn="l" indent="0" marL="0">
+              <a:lnSpc>
+                <a:spcPct val="106000"/>
+              </a:lnSpc>
+              <a:spcAft>
+                <a:spcPts val="300"/>
+              </a:spcAft>
+              <a:buNone/>
+            </a:pPr>
+            <a:r>
+              <a:rPr lang="en-US" sz="1250" dirty="0">
                 <a:solidFill>
                   <a:srgbClr val="536177"/>
                 </a:solidFill>
@@ -3487,9 +3735,9 @@
                 <a:ea typeface="Calibri" pitchFamily="34" charset="-122"/>
                 <a:cs typeface="Calibri" pitchFamily="34" charset="-120"/>
               </a:rPr>
-              <a:t>reconciled to the cent</a:t>
-            </a:r>
-            <a:endParaRPr lang="en-US" sz="1000" dirty="0"/>
+              <a:t>The planner breaks the question into primitive subtasks and orders them as a DAG — which tape, which deal model, which waterfall.</a:t>
+            </a:r>
+            <a:endParaRPr lang="en-US" sz="1250" dirty="0"/>
           </a:p>
         </p:txBody>
       </p:sp>
@@ -3501,12 +3749,12 @@
         </p:nvSpPr>
         <p:spPr>
           <a:xfrm>
-            <a:off x="3415970" y="2423160"/>
-            <a:ext cx="2583866" cy="1783080"/>
+            <a:off x="6187288" y="2423160"/>
+            <a:ext cx="5364328" cy="1655064"/>
           </a:xfrm>
           <a:prstGeom prst="roundRect">
             <a:avLst>
-              <a:gd name="adj" fmla="val 2564"/>
+              <a:gd name="adj" fmla="val 2762"/>
             </a:avLst>
           </a:prstGeom>
           <a:solidFill>
@@ -3529,14 +3777,34 @@
       </p:sp>
       <p:sp>
         <p:nvSpPr>
-          <p:cNvPr id="14" name="Text 12"/>
-          <p:cNvSpPr/>
-          <p:nvPr/>
-        </p:nvSpPr>
-        <p:spPr>
-          <a:xfrm>
-            <a:off x="3415970" y="2606040"/>
-            <a:ext cx="2583866" cy="777240"/>
+          <p:cNvPr id="14" name="Shape 12"/>
+          <p:cNvSpPr/>
+          <p:nvPr/>
+        </p:nvSpPr>
+        <p:spPr>
+          <a:xfrm>
+            <a:off x="6187288" y="2423160"/>
+            <a:ext cx="82296" cy="1655064"/>
+          </a:xfrm>
+          <a:prstGeom prst="rect">
+            <a:avLst/>
+          </a:prstGeom>
+          <a:solidFill>
+            <a:srgbClr val="129E8F"/>
+          </a:solidFill>
+          <a:ln/>
+        </p:spPr>
+      </p:sp>
+      <p:sp>
+        <p:nvSpPr>
+          <p:cNvPr id="15" name="Text 13"/>
+          <p:cNvSpPr/>
+          <p:nvPr/>
+        </p:nvSpPr>
+        <p:spPr>
+          <a:xfrm>
+            <a:off x="6443320" y="2624328"/>
+            <a:ext cx="4907128" cy="365760"/>
           </a:xfrm>
           <a:prstGeom prst="rect">
             <a:avLst/>
@@ -3548,37 +3816,37 @@
           <a:bodyPr wrap="square" lIns="0" tIns="0" rIns="0" bIns="0" rtlCol="0" anchor="t"/>
           <a:lstStyle/>
           <a:p>
-            <a:pPr algn="ctr" indent="0" marL="0">
+            <a:pPr algn="l" indent="0" marL="0">
               <a:lnSpc>
                 <a:spcPct val="100000"/>
               </a:lnSpc>
               <a:buNone/>
             </a:pPr>
             <a:r>
-              <a:rPr lang="en-US" sz="4200" b="1" dirty="0">
-                <a:solidFill>
-                  <a:srgbClr val="2B59D6"/>
-                </a:solidFill>
-                <a:latin typeface="Calibri" pitchFamily="34" charset="0"/>
-                <a:ea typeface="Calibri" pitchFamily="34" charset="-122"/>
-                <a:cs typeface="Calibri" pitchFamily="34" charset="-120"/>
-              </a:rPr>
-              <a:t>4/4</a:t>
-            </a:r>
-            <a:endParaRPr lang="en-US" sz="4200" dirty="0"/>
-          </a:p>
-        </p:txBody>
-      </p:sp>
-      <p:sp>
-        <p:nvSpPr>
-          <p:cNvPr id="15" name="Text 13"/>
-          <p:cNvSpPr/>
-          <p:nvPr/>
-        </p:nvSpPr>
-        <p:spPr>
-          <a:xfrm>
-            <a:off x="3415970" y="3383280"/>
-            <a:ext cx="2583866" cy="320040"/>
+              <a:rPr lang="en-US" sz="1500" b="1" dirty="0">
+                <a:solidFill>
+                  <a:srgbClr val="1B2A4A"/>
+                </a:solidFill>
+                <a:latin typeface="Calibri" pitchFamily="34" charset="0"/>
+                <a:ea typeface="Calibri" pitchFamily="34" charset="-122"/>
+                <a:cs typeface="Calibri" pitchFamily="34" charset="-120"/>
+              </a:rPr>
+              <a:t>2 · Execute primitives</a:t>
+            </a:r>
+            <a:endParaRPr lang="en-US" sz="1500" dirty="0"/>
+          </a:p>
+        </p:txBody>
+      </p:sp>
+      <p:sp>
+        <p:nvSpPr>
+          <p:cNvPr id="16" name="Text 14"/>
+          <p:cNvSpPr/>
+          <p:nvPr/>
+        </p:nvSpPr>
+        <p:spPr>
+          <a:xfrm>
+            <a:off x="6443320" y="3044952"/>
+            <a:ext cx="4861408" cy="923544"/>
           </a:xfrm>
           <a:prstGeom prst="rect">
             <a:avLst/>
@@ -3590,56 +3858,17 @@
           <a:bodyPr wrap="square" lIns="0" tIns="0" rIns="0" bIns="0" rtlCol="0" anchor="t"/>
           <a:lstStyle/>
           <a:p>
-            <a:pPr algn="ctr" indent="0" marL="0">
-              <a:lnSpc>
-                <a:spcPct val="100000"/>
-              </a:lnSpc>
-              <a:buNone/>
-            </a:pPr>
-            <a:r>
-              <a:rPr lang="en-US" sz="1400" b="1" dirty="0">
-                <a:solidFill>
-                  <a:srgbClr val="1B2A4A"/>
-                </a:solidFill>
-                <a:latin typeface="Calibri" pitchFamily="34" charset="0"/>
-                <a:ea typeface="Calibri" pitchFamily="34" charset="-122"/>
-                <a:cs typeface="Calibri" pitchFamily="34" charset="-120"/>
-              </a:rPr>
-              <a:t>redemption steps</a:t>
-            </a:r>
-            <a:endParaRPr lang="en-US" sz="1400" dirty="0"/>
-          </a:p>
-        </p:txBody>
-      </p:sp>
-      <p:sp>
-        <p:nvSpPr>
-          <p:cNvPr id="16" name="Text 14"/>
-          <p:cNvSpPr/>
-          <p:nvPr/>
-        </p:nvSpPr>
-        <p:spPr>
-          <a:xfrm>
-            <a:off x="3580562" y="3703320"/>
-            <a:ext cx="2254682" cy="411480"/>
-          </a:xfrm>
-          <a:prstGeom prst="rect">
-            <a:avLst/>
-          </a:prstGeom>
-          <a:noFill/>
-          <a:ln/>
-        </p:spPr>
-        <p:txBody>
-          <a:bodyPr wrap="square" lIns="0" tIns="0" rIns="0" bIns="0" rtlCol="0" anchor="t"/>
-          <a:lstStyle/>
-          <a:p>
-            <a:pPr algn="ctr" indent="0" marL="0">
-              <a:lnSpc>
-                <a:spcPct val="100000"/>
-              </a:lnSpc>
-              <a:buNone/>
-            </a:pPr>
-            <a:r>
-              <a:rPr lang="en-US" sz="1000" dirty="0">
+            <a:pPr algn="l" indent="0" marL="0">
+              <a:lnSpc>
+                <a:spcPct val="106000"/>
+              </a:lnSpc>
+              <a:spcAft>
+                <a:spcPts val="300"/>
+              </a:spcAft>
+              <a:buNone/>
+            </a:pPr>
+            <a:r>
+              <a:rPr lang="en-US" sz="1250" dirty="0">
                 <a:solidFill>
                   <a:srgbClr val="536177"/>
                 </a:solidFill>
@@ -3647,9 +3876,9 @@
                 <a:ea typeface="Calibri" pitchFamily="34" charset="-122"/>
                 <a:cs typeface="Calibri" pitchFamily="34" charset="-120"/>
               </a:rPr>
-              <a:t>to the cent</a:t>
-            </a:r>
-            <a:endParaRPr lang="en-US" sz="1000" dirty="0"/>
+              <a:t>Typed SF primitives run the computation. Numbers are computed, not generated — the agent orchestrates, it never does arithmetic.</a:t>
+            </a:r>
+            <a:endParaRPr lang="en-US" sz="1250" dirty="0"/>
           </a:p>
         </p:txBody>
       </p:sp>
@@ -3661,12 +3890,12 @@
         </p:nvSpPr>
         <p:spPr>
           <a:xfrm>
-            <a:off x="6191860" y="2423160"/>
-            <a:ext cx="2583866" cy="1783080"/>
+            <a:off x="640080" y="4242816"/>
+            <a:ext cx="5364328" cy="1655064"/>
           </a:xfrm>
           <a:prstGeom prst="roundRect">
             <a:avLst>
-              <a:gd name="adj" fmla="val 2564"/>
+              <a:gd name="adj" fmla="val 2762"/>
             </a:avLst>
           </a:prstGeom>
           <a:solidFill>
@@ -3689,14 +3918,34 @@
       </p:sp>
       <p:sp>
         <p:nvSpPr>
-          <p:cNvPr id="18" name="Text 16"/>
-          <p:cNvSpPr/>
-          <p:nvPr/>
-        </p:nvSpPr>
-        <p:spPr>
-          <a:xfrm>
-            <a:off x="6191860" y="2606040"/>
-            <a:ext cx="2583866" cy="777240"/>
+          <p:cNvPr id="18" name="Shape 16"/>
+          <p:cNvSpPr/>
+          <p:nvPr/>
+        </p:nvSpPr>
+        <p:spPr>
+          <a:xfrm>
+            <a:off x="640080" y="4242816"/>
+            <a:ext cx="82296" cy="1655064"/>
+          </a:xfrm>
+          <a:prstGeom prst="rect">
+            <a:avLst/>
+          </a:prstGeom>
+          <a:solidFill>
+            <a:srgbClr val="1B2A4A"/>
+          </a:solidFill>
+          <a:ln/>
+        </p:spPr>
+      </p:sp>
+      <p:sp>
+        <p:nvSpPr>
+          <p:cNvPr id="19" name="Text 17"/>
+          <p:cNvSpPr/>
+          <p:nvPr/>
+        </p:nvSpPr>
+        <p:spPr>
+          <a:xfrm>
+            <a:off x="896112" y="4443984"/>
+            <a:ext cx="4907128" cy="365760"/>
           </a:xfrm>
           <a:prstGeom prst="rect">
             <a:avLst/>
@@ -3708,37 +3957,37 @@
           <a:bodyPr wrap="square" lIns="0" tIns="0" rIns="0" bIns="0" rtlCol="0" anchor="t"/>
           <a:lstStyle/>
           <a:p>
-            <a:pPr algn="ctr" indent="0" marL="0">
+            <a:pPr algn="l" indent="0" marL="0">
               <a:lnSpc>
                 <a:spcPct val="100000"/>
               </a:lnSpc>
               <a:buNone/>
             </a:pPr>
             <a:r>
-              <a:rPr lang="en-US" sz="4200" b="1" dirty="0">
-                <a:solidFill>
-                  <a:srgbClr val="2B59D6"/>
-                </a:solidFill>
-                <a:latin typeface="Calibri" pitchFamily="34" charset="0"/>
-                <a:ea typeface="Calibri" pitchFamily="34" charset="-122"/>
-                <a:cs typeface="Calibri" pitchFamily="34" charset="-120"/>
-              </a:rPr>
-              <a:t>€0.00</a:t>
-            </a:r>
-            <a:endParaRPr lang="en-US" sz="4200" dirty="0"/>
-          </a:p>
-        </p:txBody>
-      </p:sp>
-      <p:sp>
-        <p:nvSpPr>
-          <p:cNvPr id="19" name="Text 17"/>
-          <p:cNvSpPr/>
-          <p:nvPr/>
-        </p:nvSpPr>
-        <p:spPr>
-          <a:xfrm>
-            <a:off x="6191860" y="3383280"/>
-            <a:ext cx="2583866" cy="320040"/>
+              <a:rPr lang="en-US" sz="1500" b="1" dirty="0">
+                <a:solidFill>
+                  <a:srgbClr val="1B2A4A"/>
+                </a:solidFill>
+                <a:latin typeface="Calibri" pitchFamily="34" charset="0"/>
+                <a:ea typeface="Calibri" pitchFamily="34" charset="-122"/>
+                <a:cs typeface="Calibri" pitchFamily="34" charset="-120"/>
+              </a:rPr>
+              <a:t>3 · Validate &amp; gate</a:t>
+            </a:r>
+            <a:endParaRPr lang="en-US" sz="1500" dirty="0"/>
+          </a:p>
+        </p:txBody>
+      </p:sp>
+      <p:sp>
+        <p:nvSpPr>
+          <p:cNvPr id="20" name="Text 18"/>
+          <p:cNvSpPr/>
+          <p:nvPr/>
+        </p:nvSpPr>
+        <p:spPr>
+          <a:xfrm>
+            <a:off x="896112" y="4864608"/>
+            <a:ext cx="4861408" cy="923544"/>
           </a:xfrm>
           <a:prstGeom prst="rect">
             <a:avLst/>
@@ -3750,56 +3999,17 @@
           <a:bodyPr wrap="square" lIns="0" tIns="0" rIns="0" bIns="0" rtlCol="0" anchor="t"/>
           <a:lstStyle/>
           <a:p>
-            <a:pPr algn="ctr" indent="0" marL="0">
-              <a:lnSpc>
-                <a:spcPct val="100000"/>
-              </a:lnSpc>
-              <a:buNone/>
-            </a:pPr>
-            <a:r>
-              <a:rPr lang="en-US" sz="1400" b="1" dirty="0">
-                <a:solidFill>
-                  <a:srgbClr val="1B2A4A"/>
-                </a:solidFill>
-                <a:latin typeface="Calibri" pitchFamily="34" charset="0"/>
-                <a:ea typeface="Calibri" pitchFamily="34" charset="-122"/>
-                <a:cs typeface="Calibri" pitchFamily="34" charset="-120"/>
-              </a:rPr>
-              <a:t>reconciliation gap</a:t>
-            </a:r>
-            <a:endParaRPr lang="en-US" sz="1400" dirty="0"/>
-          </a:p>
-        </p:txBody>
-      </p:sp>
-      <p:sp>
-        <p:nvSpPr>
-          <p:cNvPr id="20" name="Text 18"/>
-          <p:cNvSpPr/>
-          <p:nvPr/>
-        </p:nvSpPr>
-        <p:spPr>
-          <a:xfrm>
-            <a:off x="6356452" y="3703320"/>
-            <a:ext cx="2254682" cy="411480"/>
-          </a:xfrm>
-          <a:prstGeom prst="rect">
-            <a:avLst/>
-          </a:prstGeom>
-          <a:noFill/>
-          <a:ln/>
-        </p:spPr>
-        <p:txBody>
-          <a:bodyPr wrap="square" lIns="0" tIns="0" rIns="0" bIns="0" rtlCol="0" anchor="t"/>
-          <a:lstStyle/>
-          <a:p>
-            <a:pPr algn="ctr" indent="0" marL="0">
-              <a:lnSpc>
-                <a:spcPct val="100000"/>
-              </a:lnSpc>
-              <a:buNone/>
-            </a:pPr>
-            <a:r>
-              <a:rPr lang="en-US" sz="1000" dirty="0">
+            <a:pPr algn="l" indent="0" marL="0">
+              <a:lnSpc>
+                <a:spcPct val="106000"/>
+              </a:lnSpc>
+              <a:spcAft>
+                <a:spcPts val="300"/>
+              </a:spcAft>
+              <a:buNone/>
+            </a:pPr>
+            <a:r>
+              <a:rPr lang="en-US" sz="1250" dirty="0">
                 <a:solidFill>
                   <a:srgbClr val="536177"/>
                 </a:solidFill>
@@ -3807,9 +4017,9 @@
                 <a:ea typeface="Calibri" pitchFamily="34" charset="-122"/>
                 <a:cs typeface="Calibri" pitchFamily="34" charset="-120"/>
               </a:rPr>
-              <a:t>the report's own €0.69 rounding modelled, not fudged</a:t>
-            </a:r>
-            <a:endParaRPr lang="en-US" sz="1000" dirty="0"/>
+              <a:t>Each output is validated and confidence-scored; below threshold is flagged retry-eligible and routed to human review before it can be used.</a:t>
+            </a:r>
+            <a:endParaRPr lang="en-US" sz="1250" dirty="0"/>
           </a:p>
         </p:txBody>
       </p:sp>
@@ -3821,12 +4031,12 @@
         </p:nvSpPr>
         <p:spPr>
           <a:xfrm>
-            <a:off x="8967749" y="2423160"/>
-            <a:ext cx="2583866" cy="1783080"/>
+            <a:off x="6187288" y="4242816"/>
+            <a:ext cx="5364328" cy="1655064"/>
           </a:xfrm>
           <a:prstGeom prst="roundRect">
             <a:avLst>
-              <a:gd name="adj" fmla="val 2564"/>
+              <a:gd name="adj" fmla="val 2762"/>
             </a:avLst>
           </a:prstGeom>
           <a:solidFill>
@@ -3849,14 +4059,34 @@
       </p:sp>
       <p:sp>
         <p:nvSpPr>
-          <p:cNvPr id="22" name="Text 20"/>
-          <p:cNvSpPr/>
-          <p:nvPr/>
-        </p:nvSpPr>
-        <p:spPr>
-          <a:xfrm>
-            <a:off x="8967749" y="2606040"/>
-            <a:ext cx="2583866" cy="777240"/>
+          <p:cNvPr id="22" name="Shape 20"/>
+          <p:cNvSpPr/>
+          <p:nvPr/>
+        </p:nvSpPr>
+        <p:spPr>
+          <a:xfrm>
+            <a:off x="6187288" y="4242816"/>
+            <a:ext cx="82296" cy="1655064"/>
+          </a:xfrm>
+          <a:prstGeom prst="rect">
+            <a:avLst/>
+          </a:prstGeom>
+          <a:solidFill>
+            <a:srgbClr val="2B59D6"/>
+          </a:solidFill>
+          <a:ln/>
+        </p:spPr>
+      </p:sp>
+      <p:sp>
+        <p:nvSpPr>
+          <p:cNvPr id="23" name="Text 21"/>
+          <p:cNvSpPr/>
+          <p:nvPr/>
+        </p:nvSpPr>
+        <p:spPr>
+          <a:xfrm>
+            <a:off x="6443320" y="4443984"/>
+            <a:ext cx="4907128" cy="365760"/>
           </a:xfrm>
           <a:prstGeom prst="rect">
             <a:avLst/>
@@ -3868,37 +4098,37 @@
           <a:bodyPr wrap="square" lIns="0" tIns="0" rIns="0" bIns="0" rtlCol="0" anchor="t"/>
           <a:lstStyle/>
           <a:p>
-            <a:pPr algn="ctr" indent="0" marL="0">
+            <a:pPr algn="l" indent="0" marL="0">
               <a:lnSpc>
                 <a:spcPct val="100000"/>
               </a:lnSpc>
               <a:buNone/>
             </a:pPr>
             <a:r>
-              <a:rPr lang="en-US" sz="4200" b="1" dirty="0">
-                <a:solidFill>
-                  <a:srgbClr val="2B59D6"/>
-                </a:solidFill>
-                <a:latin typeface="Calibri" pitchFamily="34" charset="0"/>
-                <a:ea typeface="Calibri" pitchFamily="34" charset="-122"/>
-                <a:cs typeface="Calibri" pitchFamily="34" charset="-120"/>
-              </a:rPr>
-              <a:t>1</a:t>
-            </a:r>
-            <a:endParaRPr lang="en-US" sz="4200" dirty="0"/>
-          </a:p>
-        </p:txBody>
-      </p:sp>
-      <p:sp>
-        <p:nvSpPr>
-          <p:cNvPr id="23" name="Text 21"/>
-          <p:cNvSpPr/>
-          <p:nvPr/>
-        </p:nvSpPr>
-        <p:spPr>
-          <a:xfrm>
-            <a:off x="8967749" y="3383280"/>
-            <a:ext cx="2583866" cy="320040"/>
+              <a:rPr lang="en-US" sz="1500" b="1" dirty="0">
+                <a:solidFill>
+                  <a:srgbClr val="1B2A4A"/>
+                </a:solidFill>
+                <a:latin typeface="Calibri" pitchFamily="34" charset="0"/>
+                <a:ea typeface="Calibri" pitchFamily="34" charset="-122"/>
+                <a:cs typeface="Calibri" pitchFamily="34" charset="-120"/>
+              </a:rPr>
+              <a:t>4 · Govern &amp; answer</a:t>
+            </a:r>
+            <a:endParaRPr lang="en-US" sz="1500" dirty="0"/>
+          </a:p>
+        </p:txBody>
+      </p:sp>
+      <p:sp>
+        <p:nvSpPr>
+          <p:cNvPr id="24" name="Text 22"/>
+          <p:cNvSpPr/>
+          <p:nvPr/>
+        </p:nvSpPr>
+        <p:spPr>
+          <a:xfrm>
+            <a:off x="6443320" y="4864608"/>
+            <a:ext cx="4861408" cy="923544"/>
           </a:xfrm>
           <a:prstGeom prst="rect">
             <a:avLst/>
@@ -3910,66 +4140,69 @@
           <a:bodyPr wrap="square" lIns="0" tIns="0" rIns="0" bIns="0" rtlCol="0" anchor="t"/>
           <a:lstStyle/>
           <a:p>
-            <a:pPr algn="ctr" indent="0" marL="0">
+            <a:pPr algn="l" indent="0" marL="0">
+              <a:lnSpc>
+                <a:spcPct val="106000"/>
+              </a:lnSpc>
+              <a:spcAft>
+                <a:spcPts val="300"/>
+              </a:spcAft>
+              <a:buNone/>
+            </a:pPr>
+            <a:r>
+              <a:rPr lang="en-US" sz="1250" dirty="0">
+                <a:solidFill>
+                  <a:srgbClr val="536177"/>
+                </a:solidFill>
+                <a:latin typeface="Calibri" pitchFamily="34" charset="0"/>
+                <a:ea typeface="Calibri" pitchFamily="34" charset="-122"/>
+                <a:cs typeface="Calibri" pitchFamily="34" charset="-120"/>
+              </a:rPr>
+              <a:t>Min-confidence aggregated, citations deduplicated, an audit entry written — then a grounded answer with its evidence pack is returned.</a:t>
+            </a:r>
+            <a:endParaRPr lang="en-US" sz="1250" dirty="0"/>
+          </a:p>
+        </p:txBody>
+      </p:sp>
+      <p:sp>
+        <p:nvSpPr>
+          <p:cNvPr id="25" name="Text 23"/>
+          <p:cNvSpPr/>
+          <p:nvPr/>
+        </p:nvSpPr>
+        <p:spPr>
+          <a:xfrm>
+            <a:off x="640080" y="5989320"/>
+            <a:ext cx="10911535" cy="365760"/>
+          </a:xfrm>
+          <a:prstGeom prst="rect">
+            <a:avLst/>
+          </a:prstGeom>
+          <a:noFill/>
+          <a:ln/>
+        </p:spPr>
+        <p:txBody>
+          <a:bodyPr wrap="square" lIns="0" tIns="0" rIns="0" bIns="0" rtlCol="0" anchor="t"/>
+          <a:lstStyle/>
+          <a:p>
+            <a:pPr algn="l" indent="0" marL="0">
               <a:lnSpc>
                 <a:spcPct val="100000"/>
               </a:lnSpc>
               <a:buNone/>
             </a:pPr>
             <a:r>
-              <a:rPr lang="en-US" sz="1400" b="1" dirty="0">
-                <a:solidFill>
-                  <a:srgbClr val="1B2A4A"/>
-                </a:solidFill>
-                <a:latin typeface="Calibri" pitchFamily="34" charset="0"/>
-                <a:ea typeface="Calibri" pitchFamily="34" charset="-122"/>
-                <a:cs typeface="Calibri" pitchFamily="34" charset="-120"/>
-              </a:rPr>
-              <a:t>real ING deal</a:t>
-            </a:r>
-            <a:endParaRPr lang="en-US" sz="1400" dirty="0"/>
-          </a:p>
-        </p:txBody>
-      </p:sp>
-      <p:sp>
-        <p:nvSpPr>
-          <p:cNvPr id="24" name="Text 22"/>
-          <p:cNvSpPr/>
-          <p:nvPr/>
-        </p:nvSpPr>
-        <p:spPr>
-          <a:xfrm>
-            <a:off x="9132341" y="3703320"/>
-            <a:ext cx="2254682" cy="411480"/>
-          </a:xfrm>
-          <a:prstGeom prst="rect">
-            <a:avLst/>
-          </a:prstGeom>
-          <a:noFill/>
-          <a:ln/>
-        </p:spPr>
-        <p:txBody>
-          <a:bodyPr wrap="square" lIns="0" tIns="0" rIns="0" bIns="0" rtlCol="0" anchor="t"/>
-          <a:lstStyle/>
-          <a:p>
-            <a:pPr algn="ctr" indent="0" marL="0">
-              <a:lnSpc>
-                <a:spcPct val="100000"/>
-              </a:lnSpc>
-              <a:buNone/>
-            </a:pPr>
-            <a:r>
-              <a:rPr lang="en-US" sz="1000" dirty="0">
-                <a:solidFill>
-                  <a:srgbClr val="536177"/>
-                </a:solidFill>
-                <a:latin typeface="Calibri" pitchFamily="34" charset="0"/>
-                <a:ea typeface="Calibri" pitchFamily="34" charset="-122"/>
-                <a:cs typeface="Calibri" pitchFamily="34" charset="-120"/>
-              </a:rPr>
-              <a:t>its own published quarterly report</a:t>
-            </a:r>
-            <a:endParaRPr lang="en-US" sz="1000" dirty="0"/>
+              <a:rPr lang="en-US" sz="1200" i="1" dirty="0">
+                <a:solidFill>
+                  <a:srgbClr val="6B7A90"/>
+                </a:solidFill>
+                <a:latin typeface="Calibri" pitchFamily="34" charset="0"/>
+                <a:ea typeface="Calibri" pitchFamily="34" charset="-122"/>
+                <a:cs typeface="Calibri" pitchFamily="34" charset="-120"/>
+              </a:rPr>
+              <a:t>Human-review routing is live; the validator-driven auto-retry is a documented hook, not yet a live re-invocation loop.</a:t>
+            </a:r>
+            <a:endParaRPr lang="en-US" sz="1200" dirty="0"/>
           </a:p>
         </p:txBody>
       </p:sp>
@@ -4061,7 +4294,7 @@
                 <a:ea typeface="Calibri" pitchFamily="34" charset="-122"/>
                 <a:cs typeface="Calibri" pitchFamily="34" charset="-120"/>
               </a:rPr>
-              <a:t>BROADLY APPLICABLE — NOT HARDCODED</a:t>
+              <a:t>THE PROOF</a:t>
             </a:r>
             <a:endParaRPr lang="en-US" sz="1200" dirty="0"/>
           </a:p>
@@ -4103,7 +4336,7 @@
                 <a:ea typeface="Calibri" pitchFamily="34" charset="-122"/>
                 <a:cs typeface="Calibri" pitchFamily="34" charset="-120"/>
               </a:rPr>
-              <a:t>The same primitives across three jurisdictions</a:t>
+              <a:t>Validated against a real ING deal — to the cent</a:t>
             </a:r>
             <a:endParaRPr lang="en-US" sz="2800" dirty="0"/>
           </a:p>
@@ -4230,9 +4463,948 @@
           </a:p>
         </p:txBody>
       </p:sp>
+      <p:sp>
+        <p:nvSpPr>
+          <p:cNvPr id="8" name="Text 6"/>
+          <p:cNvSpPr/>
+          <p:nvPr/>
+        </p:nvSpPr>
+        <p:spPr>
+          <a:xfrm>
+            <a:off x="640080" y="1572768"/>
+            <a:ext cx="10911535" cy="640080"/>
+          </a:xfrm>
+          <a:prstGeom prst="rect">
+            <a:avLst/>
+          </a:prstGeom>
+          <a:noFill/>
+          <a:ln/>
+        </p:spPr>
+        <p:txBody>
+          <a:bodyPr wrap="square" lIns="0" tIns="0" rIns="0" bIns="0" rtlCol="0" anchor="t"/>
+          <a:lstStyle/>
+          <a:p>
+            <a:pPr algn="l" indent="0" marL="0">
+              <a:lnSpc>
+                <a:spcPct val="110000"/>
+              </a:lnSpc>
+              <a:buNone/>
+            </a:pPr>
+            <a:r>
+              <a:rPr lang="en-US" sz="1400" dirty="0">
+                <a:solidFill>
+                  <a:srgbClr val="536177"/>
+                </a:solidFill>
+                <a:latin typeface="Calibri" pitchFamily="34" charset="0"/>
+                <a:ea typeface="Calibri" pitchFamily="34" charset="-122"/>
+                <a:cs typeface="Calibri" pitchFamily="34" charset="-120"/>
+              </a:rPr>
+              <a:t>Green Lion 2024-1: our engine re-runs the deal's own published Notes &amp; Cash waterfall. No report distribution figures fed in — Class A interest is computed (balance × coupon × days/360).</a:t>
+            </a:r>
+            <a:endParaRPr lang="en-US" sz="1400" dirty="0"/>
+          </a:p>
+        </p:txBody>
+      </p:sp>
+      <p:sp>
+        <p:nvSpPr>
+          <p:cNvPr id="9" name="Shape 7"/>
+          <p:cNvSpPr/>
+          <p:nvPr/>
+        </p:nvSpPr>
+        <p:spPr>
+          <a:xfrm>
+            <a:off x="640080" y="2423160"/>
+            <a:ext cx="2583866" cy="1783080"/>
+          </a:xfrm>
+          <a:prstGeom prst="roundRect">
+            <a:avLst>
+              <a:gd name="adj" fmla="val 2564"/>
+            </a:avLst>
+          </a:prstGeom>
+          <a:solidFill>
+            <a:srgbClr val="F4F7FB"/>
+          </a:solidFill>
+          <a:ln w="12700">
+            <a:solidFill>
+              <a:srgbClr val="DDE4EE"/>
+            </a:solidFill>
+            <a:prstDash val="solid"/>
+          </a:ln>
+          <a:effectLst>
+            <a:outerShdw sx="100000" sy="100000" kx="0" ky="0" algn="bl" rotWithShape="0" blurRad="88900" dist="38100" dir="5400000">
+              <a:srgbClr val="1B2A4A">
+                <a:alpha val="12000"/>
+              </a:srgbClr>
+            </a:outerShdw>
+          </a:effectLst>
+        </p:spPr>
+      </p:sp>
+      <p:sp>
+        <p:nvSpPr>
+          <p:cNvPr id="10" name="Text 8"/>
+          <p:cNvSpPr/>
+          <p:nvPr/>
+        </p:nvSpPr>
+        <p:spPr>
+          <a:xfrm>
+            <a:off x="640080" y="2606040"/>
+            <a:ext cx="2583866" cy="777240"/>
+          </a:xfrm>
+          <a:prstGeom prst="rect">
+            <a:avLst/>
+          </a:prstGeom>
+          <a:noFill/>
+          <a:ln/>
+        </p:spPr>
+        <p:txBody>
+          <a:bodyPr wrap="square" lIns="0" tIns="0" rIns="0" bIns="0" rtlCol="0" anchor="t"/>
+          <a:lstStyle/>
+          <a:p>
+            <a:pPr algn="ctr" indent="0" marL="0">
+              <a:lnSpc>
+                <a:spcPct val="100000"/>
+              </a:lnSpc>
+              <a:buNone/>
+            </a:pPr>
+            <a:r>
+              <a:rPr lang="en-US" sz="4200" b="1" dirty="0">
+                <a:solidFill>
+                  <a:srgbClr val="2B59D6"/>
+                </a:solidFill>
+                <a:latin typeface="Calibri" pitchFamily="34" charset="0"/>
+                <a:ea typeface="Calibri" pitchFamily="34" charset="-122"/>
+                <a:cs typeface="Calibri" pitchFamily="34" charset="-120"/>
+              </a:rPr>
+              <a:t>11/11</a:t>
+            </a:r>
+            <a:endParaRPr lang="en-US" sz="4200" dirty="0"/>
+          </a:p>
+        </p:txBody>
+      </p:sp>
+      <p:sp>
+        <p:nvSpPr>
+          <p:cNvPr id="11" name="Text 9"/>
+          <p:cNvSpPr/>
+          <p:nvPr/>
+        </p:nvSpPr>
+        <p:spPr>
+          <a:xfrm>
+            <a:off x="640080" y="3383280"/>
+            <a:ext cx="2583866" cy="320040"/>
+          </a:xfrm>
+          <a:prstGeom prst="rect">
+            <a:avLst/>
+          </a:prstGeom>
+          <a:noFill/>
+          <a:ln/>
+        </p:spPr>
+        <p:txBody>
+          <a:bodyPr wrap="square" lIns="0" tIns="0" rIns="0" bIns="0" rtlCol="0" anchor="t"/>
+          <a:lstStyle/>
+          <a:p>
+            <a:pPr algn="ctr" indent="0" marL="0">
+              <a:lnSpc>
+                <a:spcPct val="100000"/>
+              </a:lnSpc>
+              <a:buNone/>
+            </a:pPr>
+            <a:r>
+              <a:rPr lang="en-US" sz="1400" b="1" dirty="0">
+                <a:solidFill>
+                  <a:srgbClr val="1B2A4A"/>
+                </a:solidFill>
+                <a:latin typeface="Calibri" pitchFamily="34" charset="0"/>
+                <a:ea typeface="Calibri" pitchFamily="34" charset="-122"/>
+                <a:cs typeface="Calibri" pitchFamily="34" charset="-120"/>
+              </a:rPr>
+              <a:t>revenue PoP steps</a:t>
+            </a:r>
+            <a:endParaRPr lang="en-US" sz="1400" dirty="0"/>
+          </a:p>
+        </p:txBody>
+      </p:sp>
+      <p:sp>
+        <p:nvSpPr>
+          <p:cNvPr id="12" name="Text 10"/>
+          <p:cNvSpPr/>
+          <p:nvPr/>
+        </p:nvSpPr>
+        <p:spPr>
+          <a:xfrm>
+            <a:off x="804672" y="3703320"/>
+            <a:ext cx="2254682" cy="411480"/>
+          </a:xfrm>
+          <a:prstGeom prst="rect">
+            <a:avLst/>
+          </a:prstGeom>
+          <a:noFill/>
+          <a:ln/>
+        </p:spPr>
+        <p:txBody>
+          <a:bodyPr wrap="square" lIns="0" tIns="0" rIns="0" bIns="0" rtlCol="0" anchor="t"/>
+          <a:lstStyle/>
+          <a:p>
+            <a:pPr algn="ctr" indent="0" marL="0">
+              <a:lnSpc>
+                <a:spcPct val="100000"/>
+              </a:lnSpc>
+              <a:buNone/>
+            </a:pPr>
+            <a:r>
+              <a:rPr lang="en-US" sz="1000" dirty="0">
+                <a:solidFill>
+                  <a:srgbClr val="536177"/>
+                </a:solidFill>
+                <a:latin typeface="Calibri" pitchFamily="34" charset="0"/>
+                <a:ea typeface="Calibri" pitchFamily="34" charset="-122"/>
+                <a:cs typeface="Calibri" pitchFamily="34" charset="-120"/>
+              </a:rPr>
+              <a:t>reconciled to the cent</a:t>
+            </a:r>
+            <a:endParaRPr lang="en-US" sz="1000" dirty="0"/>
+          </a:p>
+        </p:txBody>
+      </p:sp>
+      <p:sp>
+        <p:nvSpPr>
+          <p:cNvPr id="13" name="Shape 11"/>
+          <p:cNvSpPr/>
+          <p:nvPr/>
+        </p:nvSpPr>
+        <p:spPr>
+          <a:xfrm>
+            <a:off x="3415970" y="2423160"/>
+            <a:ext cx="2583866" cy="1783080"/>
+          </a:xfrm>
+          <a:prstGeom prst="roundRect">
+            <a:avLst>
+              <a:gd name="adj" fmla="val 2564"/>
+            </a:avLst>
+          </a:prstGeom>
+          <a:solidFill>
+            <a:srgbClr val="F4F7FB"/>
+          </a:solidFill>
+          <a:ln w="12700">
+            <a:solidFill>
+              <a:srgbClr val="DDE4EE"/>
+            </a:solidFill>
+            <a:prstDash val="solid"/>
+          </a:ln>
+          <a:effectLst>
+            <a:outerShdw sx="100000" sy="100000" kx="0" ky="0" algn="bl" rotWithShape="0" blurRad="88900" dist="38100" dir="5400000">
+              <a:srgbClr val="1B2A4A">
+                <a:alpha val="12000"/>
+              </a:srgbClr>
+            </a:outerShdw>
+          </a:effectLst>
+        </p:spPr>
+      </p:sp>
+      <p:sp>
+        <p:nvSpPr>
+          <p:cNvPr id="14" name="Text 12"/>
+          <p:cNvSpPr/>
+          <p:nvPr/>
+        </p:nvSpPr>
+        <p:spPr>
+          <a:xfrm>
+            <a:off x="3415970" y="2606040"/>
+            <a:ext cx="2583866" cy="777240"/>
+          </a:xfrm>
+          <a:prstGeom prst="rect">
+            <a:avLst/>
+          </a:prstGeom>
+          <a:noFill/>
+          <a:ln/>
+        </p:spPr>
+        <p:txBody>
+          <a:bodyPr wrap="square" lIns="0" tIns="0" rIns="0" bIns="0" rtlCol="0" anchor="t"/>
+          <a:lstStyle/>
+          <a:p>
+            <a:pPr algn="ctr" indent="0" marL="0">
+              <a:lnSpc>
+                <a:spcPct val="100000"/>
+              </a:lnSpc>
+              <a:buNone/>
+            </a:pPr>
+            <a:r>
+              <a:rPr lang="en-US" sz="4200" b="1" dirty="0">
+                <a:solidFill>
+                  <a:srgbClr val="2B59D6"/>
+                </a:solidFill>
+                <a:latin typeface="Calibri" pitchFamily="34" charset="0"/>
+                <a:ea typeface="Calibri" pitchFamily="34" charset="-122"/>
+                <a:cs typeface="Calibri" pitchFamily="34" charset="-120"/>
+              </a:rPr>
+              <a:t>4/4</a:t>
+            </a:r>
+            <a:endParaRPr lang="en-US" sz="4200" dirty="0"/>
+          </a:p>
+        </p:txBody>
+      </p:sp>
+      <p:sp>
+        <p:nvSpPr>
+          <p:cNvPr id="15" name="Text 13"/>
+          <p:cNvSpPr/>
+          <p:nvPr/>
+        </p:nvSpPr>
+        <p:spPr>
+          <a:xfrm>
+            <a:off x="3415970" y="3383280"/>
+            <a:ext cx="2583866" cy="320040"/>
+          </a:xfrm>
+          <a:prstGeom prst="rect">
+            <a:avLst/>
+          </a:prstGeom>
+          <a:noFill/>
+          <a:ln/>
+        </p:spPr>
+        <p:txBody>
+          <a:bodyPr wrap="square" lIns="0" tIns="0" rIns="0" bIns="0" rtlCol="0" anchor="t"/>
+          <a:lstStyle/>
+          <a:p>
+            <a:pPr algn="ctr" indent="0" marL="0">
+              <a:lnSpc>
+                <a:spcPct val="100000"/>
+              </a:lnSpc>
+              <a:buNone/>
+            </a:pPr>
+            <a:r>
+              <a:rPr lang="en-US" sz="1400" b="1" dirty="0">
+                <a:solidFill>
+                  <a:srgbClr val="1B2A4A"/>
+                </a:solidFill>
+                <a:latin typeface="Calibri" pitchFamily="34" charset="0"/>
+                <a:ea typeface="Calibri" pitchFamily="34" charset="-122"/>
+                <a:cs typeface="Calibri" pitchFamily="34" charset="-120"/>
+              </a:rPr>
+              <a:t>redemption steps</a:t>
+            </a:r>
+            <a:endParaRPr lang="en-US" sz="1400" dirty="0"/>
+          </a:p>
+        </p:txBody>
+      </p:sp>
+      <p:sp>
+        <p:nvSpPr>
+          <p:cNvPr id="16" name="Text 14"/>
+          <p:cNvSpPr/>
+          <p:nvPr/>
+        </p:nvSpPr>
+        <p:spPr>
+          <a:xfrm>
+            <a:off x="3580562" y="3703320"/>
+            <a:ext cx="2254682" cy="411480"/>
+          </a:xfrm>
+          <a:prstGeom prst="rect">
+            <a:avLst/>
+          </a:prstGeom>
+          <a:noFill/>
+          <a:ln/>
+        </p:spPr>
+        <p:txBody>
+          <a:bodyPr wrap="square" lIns="0" tIns="0" rIns="0" bIns="0" rtlCol="0" anchor="t"/>
+          <a:lstStyle/>
+          <a:p>
+            <a:pPr algn="ctr" indent="0" marL="0">
+              <a:lnSpc>
+                <a:spcPct val="100000"/>
+              </a:lnSpc>
+              <a:buNone/>
+            </a:pPr>
+            <a:r>
+              <a:rPr lang="en-US" sz="1000" dirty="0">
+                <a:solidFill>
+                  <a:srgbClr val="536177"/>
+                </a:solidFill>
+                <a:latin typeface="Calibri" pitchFamily="34" charset="0"/>
+                <a:ea typeface="Calibri" pitchFamily="34" charset="-122"/>
+                <a:cs typeface="Calibri" pitchFamily="34" charset="-120"/>
+              </a:rPr>
+              <a:t>to the cent</a:t>
+            </a:r>
+            <a:endParaRPr lang="en-US" sz="1000" dirty="0"/>
+          </a:p>
+        </p:txBody>
+      </p:sp>
+      <p:sp>
+        <p:nvSpPr>
+          <p:cNvPr id="17" name="Shape 15"/>
+          <p:cNvSpPr/>
+          <p:nvPr/>
+        </p:nvSpPr>
+        <p:spPr>
+          <a:xfrm>
+            <a:off x="6191860" y="2423160"/>
+            <a:ext cx="2583866" cy="1783080"/>
+          </a:xfrm>
+          <a:prstGeom prst="roundRect">
+            <a:avLst>
+              <a:gd name="adj" fmla="val 2564"/>
+            </a:avLst>
+          </a:prstGeom>
+          <a:solidFill>
+            <a:srgbClr val="F4F7FB"/>
+          </a:solidFill>
+          <a:ln w="12700">
+            <a:solidFill>
+              <a:srgbClr val="DDE4EE"/>
+            </a:solidFill>
+            <a:prstDash val="solid"/>
+          </a:ln>
+          <a:effectLst>
+            <a:outerShdw sx="100000" sy="100000" kx="0" ky="0" algn="bl" rotWithShape="0" blurRad="88900" dist="38100" dir="5400000">
+              <a:srgbClr val="1B2A4A">
+                <a:alpha val="12000"/>
+              </a:srgbClr>
+            </a:outerShdw>
+          </a:effectLst>
+        </p:spPr>
+      </p:sp>
+      <p:sp>
+        <p:nvSpPr>
+          <p:cNvPr id="18" name="Text 16"/>
+          <p:cNvSpPr/>
+          <p:nvPr/>
+        </p:nvSpPr>
+        <p:spPr>
+          <a:xfrm>
+            <a:off x="6191860" y="2606040"/>
+            <a:ext cx="2583866" cy="777240"/>
+          </a:xfrm>
+          <a:prstGeom prst="rect">
+            <a:avLst/>
+          </a:prstGeom>
+          <a:noFill/>
+          <a:ln/>
+        </p:spPr>
+        <p:txBody>
+          <a:bodyPr wrap="square" lIns="0" tIns="0" rIns="0" bIns="0" rtlCol="0" anchor="t"/>
+          <a:lstStyle/>
+          <a:p>
+            <a:pPr algn="ctr" indent="0" marL="0">
+              <a:lnSpc>
+                <a:spcPct val="100000"/>
+              </a:lnSpc>
+              <a:buNone/>
+            </a:pPr>
+            <a:r>
+              <a:rPr lang="en-US" sz="4200" b="1" dirty="0">
+                <a:solidFill>
+                  <a:srgbClr val="2B59D6"/>
+                </a:solidFill>
+                <a:latin typeface="Calibri" pitchFamily="34" charset="0"/>
+                <a:ea typeface="Calibri" pitchFamily="34" charset="-122"/>
+                <a:cs typeface="Calibri" pitchFamily="34" charset="-120"/>
+              </a:rPr>
+              <a:t>€0.00</a:t>
+            </a:r>
+            <a:endParaRPr lang="en-US" sz="4200" dirty="0"/>
+          </a:p>
+        </p:txBody>
+      </p:sp>
+      <p:sp>
+        <p:nvSpPr>
+          <p:cNvPr id="19" name="Text 17"/>
+          <p:cNvSpPr/>
+          <p:nvPr/>
+        </p:nvSpPr>
+        <p:spPr>
+          <a:xfrm>
+            <a:off x="6191860" y="3383280"/>
+            <a:ext cx="2583866" cy="320040"/>
+          </a:xfrm>
+          <a:prstGeom prst="rect">
+            <a:avLst/>
+          </a:prstGeom>
+          <a:noFill/>
+          <a:ln/>
+        </p:spPr>
+        <p:txBody>
+          <a:bodyPr wrap="square" lIns="0" tIns="0" rIns="0" bIns="0" rtlCol="0" anchor="t"/>
+          <a:lstStyle/>
+          <a:p>
+            <a:pPr algn="ctr" indent="0" marL="0">
+              <a:lnSpc>
+                <a:spcPct val="100000"/>
+              </a:lnSpc>
+              <a:buNone/>
+            </a:pPr>
+            <a:r>
+              <a:rPr lang="en-US" sz="1400" b="1" dirty="0">
+                <a:solidFill>
+                  <a:srgbClr val="1B2A4A"/>
+                </a:solidFill>
+                <a:latin typeface="Calibri" pitchFamily="34" charset="0"/>
+                <a:ea typeface="Calibri" pitchFamily="34" charset="-122"/>
+                <a:cs typeface="Calibri" pitchFamily="34" charset="-120"/>
+              </a:rPr>
+              <a:t>reconciliation gap</a:t>
+            </a:r>
+            <a:endParaRPr lang="en-US" sz="1400" dirty="0"/>
+          </a:p>
+        </p:txBody>
+      </p:sp>
+      <p:sp>
+        <p:nvSpPr>
+          <p:cNvPr id="20" name="Text 18"/>
+          <p:cNvSpPr/>
+          <p:nvPr/>
+        </p:nvSpPr>
+        <p:spPr>
+          <a:xfrm>
+            <a:off x="6356452" y="3703320"/>
+            <a:ext cx="2254682" cy="411480"/>
+          </a:xfrm>
+          <a:prstGeom prst="rect">
+            <a:avLst/>
+          </a:prstGeom>
+          <a:noFill/>
+          <a:ln/>
+        </p:spPr>
+        <p:txBody>
+          <a:bodyPr wrap="square" lIns="0" tIns="0" rIns="0" bIns="0" rtlCol="0" anchor="t"/>
+          <a:lstStyle/>
+          <a:p>
+            <a:pPr algn="ctr" indent="0" marL="0">
+              <a:lnSpc>
+                <a:spcPct val="100000"/>
+              </a:lnSpc>
+              <a:buNone/>
+            </a:pPr>
+            <a:r>
+              <a:rPr lang="en-US" sz="1000" dirty="0">
+                <a:solidFill>
+                  <a:srgbClr val="536177"/>
+                </a:solidFill>
+                <a:latin typeface="Calibri" pitchFamily="34" charset="0"/>
+                <a:ea typeface="Calibri" pitchFamily="34" charset="-122"/>
+                <a:cs typeface="Calibri" pitchFamily="34" charset="-120"/>
+              </a:rPr>
+              <a:t>the report's own €0.69 rounding modelled, not fudged</a:t>
+            </a:r>
+            <a:endParaRPr lang="en-US" sz="1000" dirty="0"/>
+          </a:p>
+        </p:txBody>
+      </p:sp>
+      <p:sp>
+        <p:nvSpPr>
+          <p:cNvPr id="21" name="Shape 19"/>
+          <p:cNvSpPr/>
+          <p:nvPr/>
+        </p:nvSpPr>
+        <p:spPr>
+          <a:xfrm>
+            <a:off x="8967749" y="2423160"/>
+            <a:ext cx="2583866" cy="1783080"/>
+          </a:xfrm>
+          <a:prstGeom prst="roundRect">
+            <a:avLst>
+              <a:gd name="adj" fmla="val 2564"/>
+            </a:avLst>
+          </a:prstGeom>
+          <a:solidFill>
+            <a:srgbClr val="F4F7FB"/>
+          </a:solidFill>
+          <a:ln w="12700">
+            <a:solidFill>
+              <a:srgbClr val="DDE4EE"/>
+            </a:solidFill>
+            <a:prstDash val="solid"/>
+          </a:ln>
+          <a:effectLst>
+            <a:outerShdw sx="100000" sy="100000" kx="0" ky="0" algn="bl" rotWithShape="0" blurRad="88900" dist="38100" dir="5400000">
+              <a:srgbClr val="1B2A4A">
+                <a:alpha val="12000"/>
+              </a:srgbClr>
+            </a:outerShdw>
+          </a:effectLst>
+        </p:spPr>
+      </p:sp>
+      <p:sp>
+        <p:nvSpPr>
+          <p:cNvPr id="22" name="Text 20"/>
+          <p:cNvSpPr/>
+          <p:nvPr/>
+        </p:nvSpPr>
+        <p:spPr>
+          <a:xfrm>
+            <a:off x="8967749" y="2606040"/>
+            <a:ext cx="2583866" cy="777240"/>
+          </a:xfrm>
+          <a:prstGeom prst="rect">
+            <a:avLst/>
+          </a:prstGeom>
+          <a:noFill/>
+          <a:ln/>
+        </p:spPr>
+        <p:txBody>
+          <a:bodyPr wrap="square" lIns="0" tIns="0" rIns="0" bIns="0" rtlCol="0" anchor="t"/>
+          <a:lstStyle/>
+          <a:p>
+            <a:pPr algn="ctr" indent="0" marL="0">
+              <a:lnSpc>
+                <a:spcPct val="100000"/>
+              </a:lnSpc>
+              <a:buNone/>
+            </a:pPr>
+            <a:r>
+              <a:rPr lang="en-US" sz="4200" b="1" dirty="0">
+                <a:solidFill>
+                  <a:srgbClr val="2B59D6"/>
+                </a:solidFill>
+                <a:latin typeface="Calibri" pitchFamily="34" charset="0"/>
+                <a:ea typeface="Calibri" pitchFamily="34" charset="-122"/>
+                <a:cs typeface="Calibri" pitchFamily="34" charset="-120"/>
+              </a:rPr>
+              <a:t>1</a:t>
+            </a:r>
+            <a:endParaRPr lang="en-US" sz="4200" dirty="0"/>
+          </a:p>
+        </p:txBody>
+      </p:sp>
+      <p:sp>
+        <p:nvSpPr>
+          <p:cNvPr id="23" name="Text 21"/>
+          <p:cNvSpPr/>
+          <p:nvPr/>
+        </p:nvSpPr>
+        <p:spPr>
+          <a:xfrm>
+            <a:off x="8967749" y="3383280"/>
+            <a:ext cx="2583866" cy="320040"/>
+          </a:xfrm>
+          <a:prstGeom prst="rect">
+            <a:avLst/>
+          </a:prstGeom>
+          <a:noFill/>
+          <a:ln/>
+        </p:spPr>
+        <p:txBody>
+          <a:bodyPr wrap="square" lIns="0" tIns="0" rIns="0" bIns="0" rtlCol="0" anchor="t"/>
+          <a:lstStyle/>
+          <a:p>
+            <a:pPr algn="ctr" indent="0" marL="0">
+              <a:lnSpc>
+                <a:spcPct val="100000"/>
+              </a:lnSpc>
+              <a:buNone/>
+            </a:pPr>
+            <a:r>
+              <a:rPr lang="en-US" sz="1400" b="1" dirty="0">
+                <a:solidFill>
+                  <a:srgbClr val="1B2A4A"/>
+                </a:solidFill>
+                <a:latin typeface="Calibri" pitchFamily="34" charset="0"/>
+                <a:ea typeface="Calibri" pitchFamily="34" charset="-122"/>
+                <a:cs typeface="Calibri" pitchFamily="34" charset="-120"/>
+              </a:rPr>
+              <a:t>real ING deal</a:t>
+            </a:r>
+            <a:endParaRPr lang="en-US" sz="1400" dirty="0"/>
+          </a:p>
+        </p:txBody>
+      </p:sp>
+      <p:sp>
+        <p:nvSpPr>
+          <p:cNvPr id="24" name="Text 22"/>
+          <p:cNvSpPr/>
+          <p:nvPr/>
+        </p:nvSpPr>
+        <p:spPr>
+          <a:xfrm>
+            <a:off x="9132341" y="3703320"/>
+            <a:ext cx="2254682" cy="411480"/>
+          </a:xfrm>
+          <a:prstGeom prst="rect">
+            <a:avLst/>
+          </a:prstGeom>
+          <a:noFill/>
+          <a:ln/>
+        </p:spPr>
+        <p:txBody>
+          <a:bodyPr wrap="square" lIns="0" tIns="0" rIns="0" bIns="0" rtlCol="0" anchor="t"/>
+          <a:lstStyle/>
+          <a:p>
+            <a:pPr algn="ctr" indent="0" marL="0">
+              <a:lnSpc>
+                <a:spcPct val="100000"/>
+              </a:lnSpc>
+              <a:buNone/>
+            </a:pPr>
+            <a:r>
+              <a:rPr lang="en-US" sz="1000" dirty="0">
+                <a:solidFill>
+                  <a:srgbClr val="536177"/>
+                </a:solidFill>
+                <a:latin typeface="Calibri" pitchFamily="34" charset="0"/>
+                <a:ea typeface="Calibri" pitchFamily="34" charset="-122"/>
+                <a:cs typeface="Calibri" pitchFamily="34" charset="-120"/>
+              </a:rPr>
+              <a:t>its own published quarterly report</a:t>
+            </a:r>
+            <a:endParaRPr lang="en-US" sz="1000" dirty="0"/>
+          </a:p>
+        </p:txBody>
+      </p:sp>
+    </p:spTree>
+  </p:cSld>
+  <p:clrMapOvr>
+    <a:masterClrMapping/>
+  </p:clrMapOvr>
+</p:sld>
+</file>
+
+<file path=ppt/slides/slide5.xml><?xml version="1.0" encoding="utf-8"?>
+<p:sld xmlns:a="http://schemas.openxmlformats.org/drawingml/2006/main" xmlns:r="http://schemas.openxmlformats.org/officeDocument/2006/relationships" xmlns:p="http://schemas.openxmlformats.org/presentationml/2006/main">
+  <p:cSld name="Slide 5">
+    <p:bg>
+      <p:bgPr>
+        <a:solidFill>
+          <a:srgbClr val="FFFFFF"/>
+        </a:solidFill>
+      </p:bgPr>
+    </p:bg>
+    <p:spTree>
+      <p:nvGrpSpPr>
+        <p:cNvPr id="1" name=""/>
+        <p:cNvGrpSpPr/>
+        <p:nvPr/>
+      </p:nvGrpSpPr>
+      <p:grpSpPr>
+        <a:xfrm>
+          <a:off x="0" y="0"/>
+          <a:ext cx="0" cy="0"/>
+          <a:chOff x="0" y="0"/>
+          <a:chExt cx="0" cy="0"/>
+        </a:xfrm>
+      </p:grpSpPr>
+      <p:sp>
+        <p:nvSpPr>
+          <p:cNvPr id="2" name="Shape 0"/>
+          <p:cNvSpPr/>
+          <p:nvPr/>
+        </p:nvSpPr>
+        <p:spPr>
+          <a:xfrm>
+            <a:off x="0" y="0"/>
+            <a:ext cx="164592" cy="6858000"/>
+          </a:xfrm>
+          <a:prstGeom prst="rect">
+            <a:avLst/>
+          </a:prstGeom>
+          <a:solidFill>
+            <a:srgbClr val="2B59D6"/>
+          </a:solidFill>
+          <a:ln/>
+        </p:spPr>
+      </p:sp>
+      <p:sp>
+        <p:nvSpPr>
+          <p:cNvPr id="3" name="Text 1"/>
+          <p:cNvSpPr/>
+          <p:nvPr/>
+        </p:nvSpPr>
+        <p:spPr>
+          <a:xfrm>
+            <a:off x="640080" y="384048"/>
+            <a:ext cx="10789920" cy="274320"/>
+          </a:xfrm>
+          <a:prstGeom prst="rect">
+            <a:avLst/>
+          </a:prstGeom>
+          <a:noFill/>
+          <a:ln/>
+        </p:spPr>
+        <p:txBody>
+          <a:bodyPr wrap="square" lIns="0" tIns="0" rIns="0" bIns="0" rtlCol="0" anchor="t"/>
+          <a:lstStyle/>
+          <a:p>
+            <a:pPr algn="l" indent="0" marL="0">
+              <a:lnSpc>
+                <a:spcPct val="100000"/>
+              </a:lnSpc>
+              <a:buNone/>
+            </a:pPr>
+            <a:r>
+              <a:rPr lang="en-US" sz="1200" b="1" dirty="0">
+                <a:solidFill>
+                  <a:srgbClr val="129E8F"/>
+                </a:solidFill>
+                <a:latin typeface="Calibri" pitchFamily="34" charset="0"/>
+                <a:ea typeface="Calibri" pitchFamily="34" charset="-122"/>
+                <a:cs typeface="Calibri" pitchFamily="34" charset="-120"/>
+              </a:rPr>
+              <a:t>BROADLY APPLICABLE — NOT HARDCODED</a:t>
+            </a:r>
+            <a:endParaRPr lang="en-US" sz="1200" dirty="0"/>
+          </a:p>
+        </p:txBody>
+      </p:sp>
+      <p:sp>
+        <p:nvSpPr>
+          <p:cNvPr id="4" name="Text 2"/>
+          <p:cNvSpPr/>
+          <p:nvPr/>
+        </p:nvSpPr>
+        <p:spPr>
+          <a:xfrm>
+            <a:off x="640080" y="658368"/>
+            <a:ext cx="10881360" cy="822960"/>
+          </a:xfrm>
+          <a:prstGeom prst="rect">
+            <a:avLst/>
+          </a:prstGeom>
+          <a:noFill/>
+          <a:ln/>
+        </p:spPr>
+        <p:txBody>
+          <a:bodyPr wrap="square" lIns="0" tIns="0" rIns="0" bIns="0" rtlCol="0" anchor="t"/>
+          <a:lstStyle/>
+          <a:p>
+            <a:pPr algn="l" indent="0" marL="0">
+              <a:lnSpc>
+                <a:spcPct val="100000"/>
+              </a:lnSpc>
+              <a:buNone/>
+            </a:pPr>
+            <a:r>
+              <a:rPr lang="en-US" sz="2800" b="1" dirty="0">
+                <a:solidFill>
+                  <a:srgbClr val="1B2A4A"/>
+                </a:solidFill>
+                <a:latin typeface="Calibri" pitchFamily="34" charset="0"/>
+                <a:ea typeface="Calibri" pitchFamily="34" charset="-122"/>
+                <a:cs typeface="Calibri" pitchFamily="34" charset="-120"/>
+              </a:rPr>
+              <a:t>The same primitives across three jurisdictions</a:t>
+            </a:r>
+            <a:endParaRPr lang="en-US" sz="2800" dirty="0"/>
+          </a:p>
+        </p:txBody>
+      </p:sp>
+      <p:sp>
+        <p:nvSpPr>
+          <p:cNvPr id="5" name="Shape 3"/>
+          <p:cNvSpPr/>
+          <p:nvPr/>
+        </p:nvSpPr>
+        <p:spPr>
+          <a:xfrm>
+            <a:off x="658368" y="1335024"/>
+            <a:ext cx="548640" cy="36576"/>
+          </a:xfrm>
+          <a:prstGeom prst="rect">
+            <a:avLst/>
+          </a:prstGeom>
+          <a:solidFill>
+            <a:srgbClr val="129E8F"/>
+          </a:solidFill>
+          <a:ln/>
+        </p:spPr>
+      </p:sp>
+      <p:sp>
+        <p:nvSpPr>
+          <p:cNvPr id="6" name="Text 4"/>
+          <p:cNvSpPr/>
+          <p:nvPr/>
+        </p:nvSpPr>
+        <p:spPr>
+          <a:xfrm>
+            <a:off x="640080" y="6437376"/>
+            <a:ext cx="7315200" cy="274320"/>
+          </a:xfrm>
+          <a:prstGeom prst="rect">
+            <a:avLst/>
+          </a:prstGeom>
+          <a:noFill/>
+          <a:ln/>
+        </p:spPr>
+        <p:txBody>
+          <a:bodyPr wrap="square" lIns="0" tIns="0" rIns="0" bIns="0" rtlCol="0" anchor="t"/>
+          <a:lstStyle/>
+          <a:p>
+            <a:pPr algn="l" indent="0" marL="0">
+              <a:lnSpc>
+                <a:spcPct val="100000"/>
+              </a:lnSpc>
+              <a:buNone/>
+            </a:pPr>
+            <a:r>
+              <a:rPr lang="en-US" sz="900" b="1" dirty="0">
+                <a:solidFill>
+                  <a:srgbClr val="536177"/>
+                </a:solidFill>
+                <a:latin typeface="Calibri" pitchFamily="34" charset="0"/>
+                <a:ea typeface="Calibri" pitchFamily="34" charset="-122"/>
+                <a:cs typeface="Calibri" pitchFamily="34" charset="-120"/>
+              </a:rPr>
+              <a:t>LoanWhiz</a:t>
+            </a:r>
+            <a:pPr algn="l" indent="0" marL="0">
+              <a:lnSpc>
+                <a:spcPct val="100000"/>
+              </a:lnSpc>
+              <a:buNone/>
+            </a:pPr>
+            <a:r>
+              <a:rPr lang="en-US" sz="900" dirty="0">
+                <a:solidFill>
+                  <a:srgbClr val="6B7A90"/>
+                </a:solidFill>
+                <a:latin typeface="Calibri" pitchFamily="34" charset="0"/>
+                <a:ea typeface="Calibri" pitchFamily="34" charset="-122"/>
+                <a:cs typeface="Calibri" pitchFamily="34" charset="-120"/>
+              </a:rPr>
+              <a:t>  ·  Structured Finance Agent Framework</a:t>
+            </a:r>
+            <a:endParaRPr lang="en-US" sz="900" dirty="0"/>
+          </a:p>
+        </p:txBody>
+      </p:sp>
+      <p:sp>
+        <p:nvSpPr>
+          <p:cNvPr id="7" name="Text 5"/>
+          <p:cNvSpPr/>
+          <p:nvPr/>
+        </p:nvSpPr>
+        <p:spPr>
+          <a:xfrm>
+            <a:off x="10058400" y="6437376"/>
+            <a:ext cx="502920" cy="274320"/>
+          </a:xfrm>
+          <a:prstGeom prst="rect">
+            <a:avLst/>
+          </a:prstGeom>
+          <a:noFill/>
+          <a:ln/>
+        </p:spPr>
+        <p:txBody>
+          <a:bodyPr wrap="square" lIns="0" tIns="0" rIns="0" bIns="0" rtlCol="0" anchor="t"/>
+          <a:lstStyle/>
+          <a:p>
+            <a:pPr algn="r" indent="0" marL="0">
+              <a:lnSpc>
+                <a:spcPct val="100000"/>
+              </a:lnSpc>
+              <a:buNone/>
+            </a:pPr>
+            <a:r>
+              <a:rPr lang="en-US" sz="900" dirty="0">
+                <a:solidFill>
+                  <a:srgbClr val="6B7A90"/>
+                </a:solidFill>
+                <a:latin typeface="Calibri" pitchFamily="34" charset="0"/>
+                <a:ea typeface="Calibri" pitchFamily="34" charset="-122"/>
+                <a:cs typeface="Calibri" pitchFamily="34" charset="-120"/>
+              </a:rPr>
+              <a:t>05</a:t>
+            </a:r>
+            <a:endParaRPr lang="en-US" sz="900" dirty="0"/>
+          </a:p>
+        </p:txBody>
+      </p:sp>
       <p:graphicFrame>
         <p:nvGraphicFramePr>
-          <p:cNvPr id="5" name="Table 0"/>
+          <p:cNvPr id="6" name="Table 0"/>
           <p:cNvGraphicFramePr>
             <a:graphicFrameLocks noGrp="1"/>
           </p:cNvGraphicFramePr>
@@ -5956,9 +7128,9 @@
 </p:sld>
 </file>
 
-<file path=ppt/slides/slide5.xml><?xml version="1.0" encoding="utf-8"?>
+<file path=ppt/slides/slide6.xml><?xml version="1.0" encoding="utf-8"?>
 <p:sld xmlns:a="http://schemas.openxmlformats.org/drawingml/2006/main" xmlns:r="http://schemas.openxmlformats.org/officeDocument/2006/relationships" xmlns:p="http://schemas.openxmlformats.org/presentationml/2006/main">
-  <p:cSld name="Slide 5">
+  <p:cSld name="Slide 6">
     <p:bg>
       <p:bgPr>
         <a:solidFill>
@@ -6123,686 +7295,6 @@
               <a:t>GET /capability-matrix runs every primitive across every deal and renders it in the /showcase view: validated / ran / not-applicable, each cell carrying its real reason. Today: 1 validated, 9 ran, 15 not-applicable. N/A is shown as honest scope — never hidden, never coloured green.</a:t>
             </a:r>
             <a:endParaRPr lang="en-US" sz="1600" dirty="0"/>
-          </a:p>
-        </p:txBody>
-      </p:sp>
-    </p:spTree>
-  </p:cSld>
-  <p:clrMapOvr>
-    <a:masterClrMapping/>
-  </p:clrMapOvr>
-</p:sld>
-</file>
-
-<file path=ppt/slides/slide6.xml><?xml version="1.0" encoding="utf-8"?>
-<p:sld xmlns:a="http://schemas.openxmlformats.org/drawingml/2006/main" xmlns:r="http://schemas.openxmlformats.org/officeDocument/2006/relationships" xmlns:p="http://schemas.openxmlformats.org/presentationml/2006/main">
-  <p:cSld name="Slide 6">
-    <p:bg>
-      <p:bgPr>
-        <a:solidFill>
-          <a:srgbClr val="FFFFFF"/>
-        </a:solidFill>
-      </p:bgPr>
-    </p:bg>
-    <p:spTree>
-      <p:nvGrpSpPr>
-        <p:cNvPr id="1" name=""/>
-        <p:cNvGrpSpPr/>
-        <p:nvPr/>
-      </p:nvGrpSpPr>
-      <p:grpSpPr>
-        <a:xfrm>
-          <a:off x="0" y="0"/>
-          <a:ext cx="0" cy="0"/>
-          <a:chOff x="0" y="0"/>
-          <a:chExt cx="0" cy="0"/>
-        </a:xfrm>
-      </p:grpSpPr>
-      <p:sp>
-        <p:nvSpPr>
-          <p:cNvPr id="2" name="Shape 0"/>
-          <p:cNvSpPr/>
-          <p:nvPr/>
-        </p:nvSpPr>
-        <p:spPr>
-          <a:xfrm>
-            <a:off x="0" y="0"/>
-            <a:ext cx="164592" cy="6858000"/>
-          </a:xfrm>
-          <a:prstGeom prst="rect">
-            <a:avLst/>
-          </a:prstGeom>
-          <a:solidFill>
-            <a:srgbClr val="2B59D6"/>
-          </a:solidFill>
-          <a:ln/>
-        </p:spPr>
-      </p:sp>
-      <p:sp>
-        <p:nvSpPr>
-          <p:cNvPr id="3" name="Text 1"/>
-          <p:cNvSpPr/>
-          <p:nvPr/>
-        </p:nvSpPr>
-        <p:spPr>
-          <a:xfrm>
-            <a:off x="640080" y="384048"/>
-            <a:ext cx="10789920" cy="274320"/>
-          </a:xfrm>
-          <a:prstGeom prst="rect">
-            <a:avLst/>
-          </a:prstGeom>
-          <a:noFill/>
-          <a:ln/>
-        </p:spPr>
-        <p:txBody>
-          <a:bodyPr wrap="square" lIns="0" tIns="0" rIns="0" bIns="0" rtlCol="0" anchor="t"/>
-          <a:lstStyle/>
-          <a:p>
-            <a:pPr algn="l" indent="0" marL="0">
-              <a:lnSpc>
-                <a:spcPct val="100000"/>
-              </a:lnSpc>
-              <a:buNone/>
-            </a:pPr>
-            <a:r>
-              <a:rPr lang="en-US" sz="1200" b="1" dirty="0">
-                <a:solidFill>
-                  <a:srgbClr val="129E8F"/>
-                </a:solidFill>
-                <a:latin typeface="Calibri" pitchFamily="34" charset="0"/>
-                <a:ea typeface="Calibri" pitchFamily="34" charset="-122"/>
-                <a:cs typeface="Calibri" pitchFamily="34" charset="-120"/>
-              </a:rPr>
-              <a:t>PACKAGED FOR REUSE</a:t>
-            </a:r>
-            <a:endParaRPr lang="en-US" sz="1200" dirty="0"/>
-          </a:p>
-        </p:txBody>
-      </p:sp>
-      <p:sp>
-        <p:nvSpPr>
-          <p:cNvPr id="4" name="Text 2"/>
-          <p:cNvSpPr/>
-          <p:nvPr/>
-        </p:nvSpPr>
-        <p:spPr>
-          <a:xfrm>
-            <a:off x="640080" y="658368"/>
-            <a:ext cx="10881360" cy="822960"/>
-          </a:xfrm>
-          <a:prstGeom prst="rect">
-            <a:avLst/>
-          </a:prstGeom>
-          <a:noFill/>
-          <a:ln/>
-        </p:spPr>
-        <p:txBody>
-          <a:bodyPr wrap="square" lIns="0" tIns="0" rIns="0" bIns="0" rtlCol="0" anchor="t"/>
-          <a:lstStyle/>
-          <a:p>
-            <a:pPr algn="l" indent="0" marL="0">
-              <a:lnSpc>
-                <a:spcPct val="100000"/>
-              </a:lnSpc>
-              <a:buNone/>
-            </a:pPr>
-            <a:r>
-              <a:rPr lang="en-US" sz="2800" b="1" dirty="0">
-                <a:solidFill>
-                  <a:srgbClr val="1B2A4A"/>
-                </a:solidFill>
-                <a:latin typeface="Calibri" pitchFamily="34" charset="0"/>
-                <a:ea typeface="Calibri" pitchFamily="34" charset="-122"/>
-                <a:cs typeface="Calibri" pitchFamily="34" charset="-120"/>
-              </a:rPr>
-              <a:t>Reusable infrastructure, not a one-off</a:t>
-            </a:r>
-            <a:endParaRPr lang="en-US" sz="2800" dirty="0"/>
-          </a:p>
-        </p:txBody>
-      </p:sp>
-      <p:sp>
-        <p:nvSpPr>
-          <p:cNvPr id="5" name="Shape 3"/>
-          <p:cNvSpPr/>
-          <p:nvPr/>
-        </p:nvSpPr>
-        <p:spPr>
-          <a:xfrm>
-            <a:off x="658368" y="1335024"/>
-            <a:ext cx="548640" cy="36576"/>
-          </a:xfrm>
-          <a:prstGeom prst="rect">
-            <a:avLst/>
-          </a:prstGeom>
-          <a:solidFill>
-            <a:srgbClr val="129E8F"/>
-          </a:solidFill>
-          <a:ln/>
-        </p:spPr>
-      </p:sp>
-      <p:sp>
-        <p:nvSpPr>
-          <p:cNvPr id="6" name="Text 4"/>
-          <p:cNvSpPr/>
-          <p:nvPr/>
-        </p:nvSpPr>
-        <p:spPr>
-          <a:xfrm>
-            <a:off x="640080" y="6437376"/>
-            <a:ext cx="7315200" cy="274320"/>
-          </a:xfrm>
-          <a:prstGeom prst="rect">
-            <a:avLst/>
-          </a:prstGeom>
-          <a:noFill/>
-          <a:ln/>
-        </p:spPr>
-        <p:txBody>
-          <a:bodyPr wrap="square" lIns="0" tIns="0" rIns="0" bIns="0" rtlCol="0" anchor="t"/>
-          <a:lstStyle/>
-          <a:p>
-            <a:pPr algn="l" indent="0" marL="0">
-              <a:lnSpc>
-                <a:spcPct val="100000"/>
-              </a:lnSpc>
-              <a:buNone/>
-            </a:pPr>
-            <a:r>
-              <a:rPr lang="en-US" sz="900" b="1" dirty="0">
-                <a:solidFill>
-                  <a:srgbClr val="536177"/>
-                </a:solidFill>
-                <a:latin typeface="Calibri" pitchFamily="34" charset="0"/>
-                <a:ea typeface="Calibri" pitchFamily="34" charset="-122"/>
-                <a:cs typeface="Calibri" pitchFamily="34" charset="-120"/>
-              </a:rPr>
-              <a:t>LoanWhiz</a:t>
-            </a:r>
-            <a:pPr algn="l" indent="0" marL="0">
-              <a:lnSpc>
-                <a:spcPct val="100000"/>
-              </a:lnSpc>
-              <a:buNone/>
-            </a:pPr>
-            <a:r>
-              <a:rPr lang="en-US" sz="900" dirty="0">
-                <a:solidFill>
-                  <a:srgbClr val="6B7A90"/>
-                </a:solidFill>
-                <a:latin typeface="Calibri" pitchFamily="34" charset="0"/>
-                <a:ea typeface="Calibri" pitchFamily="34" charset="-122"/>
-                <a:cs typeface="Calibri" pitchFamily="34" charset="-120"/>
-              </a:rPr>
-              <a:t>  ·  Structured Finance Agent Framework</a:t>
-            </a:r>
-            <a:endParaRPr lang="en-US" sz="900" dirty="0"/>
-          </a:p>
-        </p:txBody>
-      </p:sp>
-      <p:sp>
-        <p:nvSpPr>
-          <p:cNvPr id="7" name="Text 5"/>
-          <p:cNvSpPr/>
-          <p:nvPr/>
-        </p:nvSpPr>
-        <p:spPr>
-          <a:xfrm>
-            <a:off x="10058400" y="6437376"/>
-            <a:ext cx="502920" cy="274320"/>
-          </a:xfrm>
-          <a:prstGeom prst="rect">
-            <a:avLst/>
-          </a:prstGeom>
-          <a:noFill/>
-          <a:ln/>
-        </p:spPr>
-        <p:txBody>
-          <a:bodyPr wrap="square" lIns="0" tIns="0" rIns="0" bIns="0" rtlCol="0" anchor="t"/>
-          <a:lstStyle/>
-          <a:p>
-            <a:pPr algn="r" indent="0" marL="0">
-              <a:lnSpc>
-                <a:spcPct val="100000"/>
-              </a:lnSpc>
-              <a:buNone/>
-            </a:pPr>
-            <a:r>
-              <a:rPr lang="en-US" sz="900" dirty="0">
-                <a:solidFill>
-                  <a:srgbClr val="6B7A90"/>
-                </a:solidFill>
-                <a:latin typeface="Calibri" pitchFamily="34" charset="0"/>
-                <a:ea typeface="Calibri" pitchFamily="34" charset="-122"/>
-                <a:cs typeface="Calibri" pitchFamily="34" charset="-120"/>
-              </a:rPr>
-              <a:t>06</a:t>
-            </a:r>
-            <a:endParaRPr lang="en-US" sz="900" dirty="0"/>
-          </a:p>
-        </p:txBody>
-      </p:sp>
-      <p:sp>
-        <p:nvSpPr>
-          <p:cNvPr id="8" name="Shape 6"/>
-          <p:cNvSpPr/>
-          <p:nvPr/>
-        </p:nvSpPr>
-        <p:spPr>
-          <a:xfrm>
-            <a:off x="640080" y="1828800"/>
-            <a:ext cx="3515258" cy="4297680"/>
-          </a:xfrm>
-          <a:prstGeom prst="roundRect">
-            <a:avLst>
-              <a:gd name="adj" fmla="val 1301"/>
-            </a:avLst>
-          </a:prstGeom>
-          <a:solidFill>
-            <a:srgbClr val="F4F7FB"/>
-          </a:solidFill>
-          <a:ln w="12700">
-            <a:solidFill>
-              <a:srgbClr val="DDE4EE"/>
-            </a:solidFill>
-            <a:prstDash val="solid"/>
-          </a:ln>
-          <a:effectLst>
-            <a:outerShdw sx="100000" sy="100000" kx="0" ky="0" algn="bl" rotWithShape="0" blurRad="88900" dist="38100" dir="5400000">
-              <a:srgbClr val="1B2A4A">
-                <a:alpha val="12000"/>
-              </a:srgbClr>
-            </a:outerShdw>
-          </a:effectLst>
-        </p:spPr>
-      </p:sp>
-      <p:sp>
-        <p:nvSpPr>
-          <p:cNvPr id="9" name="Shape 7"/>
-          <p:cNvSpPr/>
-          <p:nvPr/>
-        </p:nvSpPr>
-        <p:spPr>
-          <a:xfrm>
-            <a:off x="640080" y="1828800"/>
-            <a:ext cx="82296" cy="4297680"/>
-          </a:xfrm>
-          <a:prstGeom prst="rect">
-            <a:avLst/>
-          </a:prstGeom>
-          <a:solidFill>
-            <a:srgbClr val="2B59D6"/>
-          </a:solidFill>
-          <a:ln/>
-        </p:spPr>
-      </p:sp>
-      <p:sp>
-        <p:nvSpPr>
-          <p:cNvPr id="10" name="Text 8"/>
-          <p:cNvSpPr/>
-          <p:nvPr/>
-        </p:nvSpPr>
-        <p:spPr>
-          <a:xfrm>
-            <a:off x="896112" y="2029968"/>
-            <a:ext cx="3058058" cy="365760"/>
-          </a:xfrm>
-          <a:prstGeom prst="rect">
-            <a:avLst/>
-          </a:prstGeom>
-          <a:noFill/>
-          <a:ln/>
-        </p:spPr>
-        <p:txBody>
-          <a:bodyPr wrap="square" lIns="0" tIns="0" rIns="0" bIns="0" rtlCol="0" anchor="t"/>
-          <a:lstStyle/>
-          <a:p>
-            <a:pPr algn="l" indent="0" marL="0">
-              <a:lnSpc>
-                <a:spcPct val="100000"/>
-              </a:lnSpc>
-              <a:buNone/>
-            </a:pPr>
-            <a:r>
-              <a:rPr lang="en-US" sz="1500" b="1" dirty="0">
-                <a:solidFill>
-                  <a:srgbClr val="1B2A4A"/>
-                </a:solidFill>
-                <a:latin typeface="Calibri" pitchFamily="34" charset="0"/>
-                <a:ea typeface="Calibri" pitchFamily="34" charset="-122"/>
-                <a:cs typeface="Calibri" pitchFamily="34" charset="-120"/>
-              </a:rPr>
-              <a:t>MCP server</a:t>
-            </a:r>
-            <a:endParaRPr lang="en-US" sz="1500" dirty="0"/>
-          </a:p>
-        </p:txBody>
-      </p:sp>
-      <p:sp>
-        <p:nvSpPr>
-          <p:cNvPr id="11" name="Text 9"/>
-          <p:cNvSpPr/>
-          <p:nvPr/>
-        </p:nvSpPr>
-        <p:spPr>
-          <a:xfrm>
-            <a:off x="896112" y="2450592"/>
-            <a:ext cx="3012338" cy="3566160"/>
-          </a:xfrm>
-          <a:prstGeom prst="rect">
-            <a:avLst/>
-          </a:prstGeom>
-          <a:noFill/>
-          <a:ln/>
-        </p:spPr>
-        <p:txBody>
-          <a:bodyPr wrap="square" lIns="0" tIns="0" rIns="0" bIns="0" rtlCol="0" anchor="t"/>
-          <a:lstStyle/>
-          <a:p>
-            <a:pPr algn="l" indent="0" marL="0">
-              <a:lnSpc>
-                <a:spcPct val="106000"/>
-              </a:lnSpc>
-              <a:spcAft>
-                <a:spcPts val="300"/>
-              </a:spcAft>
-              <a:buNone/>
-            </a:pPr>
-            <a:r>
-              <a:rPr lang="en-US" sz="1250" dirty="0">
-                <a:solidFill>
-                  <a:srgbClr val="536177"/>
-                </a:solidFill>
-                <a:latin typeface="Calibri" pitchFamily="34" charset="0"/>
-                <a:ea typeface="Calibri" pitchFamily="34" charset="-122"/>
-                <a:cs typeface="Calibri" pitchFamily="34" charset="-120"/>
-              </a:rPr>
-              <a:t>The 8 SF primitives exposed as a governed MCP server — typed I/O + the evidence pack — consumable on any MCP host.</a:t>
-            </a:r>
-            <a:endParaRPr lang="en-US" sz="1250" dirty="0"/>
-          </a:p>
-        </p:txBody>
-      </p:sp>
-      <p:sp>
-        <p:nvSpPr>
-          <p:cNvPr id="12" name="Shape 10"/>
-          <p:cNvSpPr/>
-          <p:nvPr/>
-        </p:nvSpPr>
-        <p:spPr>
-          <a:xfrm>
-            <a:off x="4338218" y="1828800"/>
-            <a:ext cx="3515258" cy="4297680"/>
-          </a:xfrm>
-          <a:prstGeom prst="roundRect">
-            <a:avLst>
-              <a:gd name="adj" fmla="val 1301"/>
-            </a:avLst>
-          </a:prstGeom>
-          <a:solidFill>
-            <a:srgbClr val="F4F7FB"/>
-          </a:solidFill>
-          <a:ln w="12700">
-            <a:solidFill>
-              <a:srgbClr val="DDE4EE"/>
-            </a:solidFill>
-            <a:prstDash val="solid"/>
-          </a:ln>
-          <a:effectLst>
-            <a:outerShdw sx="100000" sy="100000" kx="0" ky="0" algn="bl" rotWithShape="0" blurRad="88900" dist="38100" dir="5400000">
-              <a:srgbClr val="1B2A4A">
-                <a:alpha val="12000"/>
-              </a:srgbClr>
-            </a:outerShdw>
-          </a:effectLst>
-        </p:spPr>
-      </p:sp>
-      <p:sp>
-        <p:nvSpPr>
-          <p:cNvPr id="13" name="Shape 11"/>
-          <p:cNvSpPr/>
-          <p:nvPr/>
-        </p:nvSpPr>
-        <p:spPr>
-          <a:xfrm>
-            <a:off x="4338218" y="1828800"/>
-            <a:ext cx="82296" cy="4297680"/>
-          </a:xfrm>
-          <a:prstGeom prst="rect">
-            <a:avLst/>
-          </a:prstGeom>
-          <a:solidFill>
-            <a:srgbClr val="129E8F"/>
-          </a:solidFill>
-          <a:ln/>
-        </p:spPr>
-      </p:sp>
-      <p:sp>
-        <p:nvSpPr>
-          <p:cNvPr id="14" name="Text 12"/>
-          <p:cNvSpPr/>
-          <p:nvPr/>
-        </p:nvSpPr>
-        <p:spPr>
-          <a:xfrm>
-            <a:off x="4594250" y="2029968"/>
-            <a:ext cx="3058058" cy="365760"/>
-          </a:xfrm>
-          <a:prstGeom prst="rect">
-            <a:avLst/>
-          </a:prstGeom>
-          <a:noFill/>
-          <a:ln/>
-        </p:spPr>
-        <p:txBody>
-          <a:bodyPr wrap="square" lIns="0" tIns="0" rIns="0" bIns="0" rtlCol="0" anchor="t"/>
-          <a:lstStyle/>
-          <a:p>
-            <a:pPr algn="l" indent="0" marL="0">
-              <a:lnSpc>
-                <a:spcPct val="100000"/>
-              </a:lnSpc>
-              <a:buNone/>
-            </a:pPr>
-            <a:r>
-              <a:rPr lang="en-US" sz="1500" b="1" dirty="0">
-                <a:solidFill>
-                  <a:srgbClr val="1B2A4A"/>
-                </a:solidFill>
-                <a:latin typeface="Calibri" pitchFamily="34" charset="0"/>
-                <a:ea typeface="Calibri" pitchFamily="34" charset="-122"/>
-                <a:cs typeface="Calibri" pitchFamily="34" charset="-120"/>
-              </a:rPr>
-              <a:t>Deal = data, not code</a:t>
-            </a:r>
-            <a:endParaRPr lang="en-US" sz="1500" dirty="0"/>
-          </a:p>
-        </p:txBody>
-      </p:sp>
-      <p:sp>
-        <p:nvSpPr>
-          <p:cNvPr id="15" name="Text 13"/>
-          <p:cNvSpPr/>
-          <p:nvPr/>
-        </p:nvSpPr>
-        <p:spPr>
-          <a:xfrm>
-            <a:off x="4594250" y="2450592"/>
-            <a:ext cx="3012338" cy="3566160"/>
-          </a:xfrm>
-          <a:prstGeom prst="rect">
-            <a:avLst/>
-          </a:prstGeom>
-          <a:noFill/>
-          <a:ln/>
-        </p:spPr>
-        <p:txBody>
-          <a:bodyPr wrap="square" lIns="0" tIns="0" rIns="0" bIns="0" rtlCol="0" anchor="t"/>
-          <a:lstStyle/>
-          <a:p>
-            <a:pPr algn="l" indent="0" marL="0">
-              <a:lnSpc>
-                <a:spcPct val="106000"/>
-              </a:lnSpc>
-              <a:spcAft>
-                <a:spcPts val="300"/>
-              </a:spcAft>
-              <a:buNone/>
-            </a:pPr>
-            <a:r>
-              <a:rPr lang="en-US" sz="1250" dirty="0">
-                <a:solidFill>
-                  <a:srgbClr val="536177"/>
-                </a:solidFill>
-                <a:latin typeface="Calibri" pitchFamily="34" charset="0"/>
-                <a:ea typeface="Calibri" pitchFamily="34" charset="-122"/>
-                <a:cs typeface="Calibri" pitchFamily="34" charset="-120"/>
-              </a:rPr>
-              <a:t>Add a deal by dropping JSON into deals.json; no Python. The interpreter executes the deal's extracted model, not hardcoded logic.</a:t>
-            </a:r>
-            <a:endParaRPr lang="en-US" sz="1250" dirty="0"/>
-          </a:p>
-        </p:txBody>
-      </p:sp>
-      <p:sp>
-        <p:nvSpPr>
-          <p:cNvPr id="16" name="Shape 14"/>
-          <p:cNvSpPr/>
-          <p:nvPr/>
-        </p:nvSpPr>
-        <p:spPr>
-          <a:xfrm>
-            <a:off x="8036357" y="1828800"/>
-            <a:ext cx="3515258" cy="4297680"/>
-          </a:xfrm>
-          <a:prstGeom prst="roundRect">
-            <a:avLst>
-              <a:gd name="adj" fmla="val 1301"/>
-            </a:avLst>
-          </a:prstGeom>
-          <a:solidFill>
-            <a:srgbClr val="F4F7FB"/>
-          </a:solidFill>
-          <a:ln w="12700">
-            <a:solidFill>
-              <a:srgbClr val="DDE4EE"/>
-            </a:solidFill>
-            <a:prstDash val="solid"/>
-          </a:ln>
-          <a:effectLst>
-            <a:outerShdw sx="100000" sy="100000" kx="0" ky="0" algn="bl" rotWithShape="0" blurRad="88900" dist="38100" dir="5400000">
-              <a:srgbClr val="1B2A4A">
-                <a:alpha val="12000"/>
-              </a:srgbClr>
-            </a:outerShdw>
-          </a:effectLst>
-        </p:spPr>
-      </p:sp>
-      <p:sp>
-        <p:nvSpPr>
-          <p:cNvPr id="17" name="Shape 15"/>
-          <p:cNvSpPr/>
-          <p:nvPr/>
-        </p:nvSpPr>
-        <p:spPr>
-          <a:xfrm>
-            <a:off x="8036357" y="1828800"/>
-            <a:ext cx="82296" cy="4297680"/>
-          </a:xfrm>
-          <a:prstGeom prst="rect">
-            <a:avLst/>
-          </a:prstGeom>
-          <a:solidFill>
-            <a:srgbClr val="1B2A4A"/>
-          </a:solidFill>
-          <a:ln/>
-        </p:spPr>
-      </p:sp>
-      <p:sp>
-        <p:nvSpPr>
-          <p:cNvPr id="18" name="Text 16"/>
-          <p:cNvSpPr/>
-          <p:nvPr/>
-        </p:nvSpPr>
-        <p:spPr>
-          <a:xfrm>
-            <a:off x="8292389" y="2029968"/>
-            <a:ext cx="3058058" cy="365760"/>
-          </a:xfrm>
-          <a:prstGeom prst="rect">
-            <a:avLst/>
-          </a:prstGeom>
-          <a:noFill/>
-          <a:ln/>
-        </p:spPr>
-        <p:txBody>
-          <a:bodyPr wrap="square" lIns="0" tIns="0" rIns="0" bIns="0" rtlCol="0" anchor="t"/>
-          <a:lstStyle/>
-          <a:p>
-            <a:pPr algn="l" indent="0" marL="0">
-              <a:lnSpc>
-                <a:spcPct val="100000"/>
-              </a:lnSpc>
-              <a:buNone/>
-            </a:pPr>
-            <a:r>
-              <a:rPr lang="en-US" sz="1500" b="1" dirty="0">
-                <a:solidFill>
-                  <a:srgbClr val="1B2A4A"/>
-                </a:solidFill>
-                <a:latin typeface="Calibri" pitchFamily="34" charset="0"/>
-                <a:ea typeface="Calibri" pitchFamily="34" charset="-122"/>
-                <a:cs typeface="Calibri" pitchFamily="34" charset="-120"/>
-              </a:rPr>
-              <a:t>Open &amp; portable</a:t>
-            </a:r>
-            <a:endParaRPr lang="en-US" sz="1500" dirty="0"/>
-          </a:p>
-        </p:txBody>
-      </p:sp>
-      <p:sp>
-        <p:nvSpPr>
-          <p:cNvPr id="19" name="Text 17"/>
-          <p:cNvSpPr/>
-          <p:nvPr/>
-        </p:nvSpPr>
-        <p:spPr>
-          <a:xfrm>
-            <a:off x="8292389" y="2450592"/>
-            <a:ext cx="3012338" cy="3566160"/>
-          </a:xfrm>
-          <a:prstGeom prst="rect">
-            <a:avLst/>
-          </a:prstGeom>
-          <a:noFill/>
-          <a:ln/>
-        </p:spPr>
-        <p:txBody>
-          <a:bodyPr wrap="square" lIns="0" tIns="0" rIns="0" bIns="0" rtlCol="0" anchor="t"/>
-          <a:lstStyle/>
-          <a:p>
-            <a:pPr algn="l" indent="0" marL="0">
-              <a:lnSpc>
-                <a:spcPct val="106000"/>
-              </a:lnSpc>
-              <a:spcAft>
-                <a:spcPts val="300"/>
-              </a:spcAft>
-              <a:buNone/>
-            </a:pPr>
-            <a:r>
-              <a:rPr lang="en-US" sz="1250" dirty="0">
-                <a:solidFill>
-                  <a:srgbClr val="536177"/>
-                </a:solidFill>
-                <a:latin typeface="Calibri" pitchFamily="34" charset="0"/>
-                <a:ea typeface="Calibri" pitchFamily="34" charset="-122"/>
-                <a:cs typeface="Calibri" pitchFamily="34" charset="-120"/>
-              </a:rPr>
-              <a:t>Apache-2.0; CSV or parquet tapes; deeploans (Algoritmica's ESMA ETL) on the ingestion path with a direct fallback.</a:t>
-            </a:r>
-            <a:endParaRPr lang="en-US" sz="1250" dirty="0"/>
           </a:p>
         </p:txBody>
       </p:sp>
@@ -6894,7 +7386,7 @@
                 <a:ea typeface="Calibri" pitchFamily="34" charset="-122"/>
                 <a:cs typeface="Calibri" pitchFamily="34" charset="-120"/>
               </a:rPr>
-              <a:t>TRUST — FINOS AI GOVERNANCE FRAMEWORK + DEEPLOANS</a:t>
+              <a:t>PACKAGED FOR REUSE</a:t>
             </a:r>
             <a:endParaRPr lang="en-US" sz="1200" dirty="0"/>
           </a:p>
@@ -6936,7 +7428,7 @@
                 <a:ea typeface="Calibri" pitchFamily="34" charset="-122"/>
                 <a:cs typeface="Calibri" pitchFamily="34" charset="-120"/>
               </a:rPr>
-              <a:t>Governance is baked into the interface</a:t>
+              <a:t>Reusable infrastructure, not a one-off</a:t>
             </a:r>
             <a:endParaRPr lang="en-US" sz="2800" dirty="0"/>
           </a:p>
@@ -7072,11 +7564,11 @@
         <p:spPr>
           <a:xfrm>
             <a:off x="640080" y="1828800"/>
-            <a:ext cx="3515258" cy="2066544"/>
+            <a:ext cx="3515258" cy="4297680"/>
           </a:xfrm>
           <a:prstGeom prst="roundRect">
             <a:avLst>
-              <a:gd name="adj" fmla="val 2212"/>
+              <a:gd name="adj" fmla="val 1301"/>
             </a:avLst>
           </a:prstGeom>
           <a:solidFill>
@@ -7106,7 +7598,7 @@
         <p:spPr>
           <a:xfrm>
             <a:off x="640080" y="1828800"/>
-            <a:ext cx="82296" cy="2066544"/>
+            <a:ext cx="82296" cy="4297680"/>
           </a:xfrm>
           <a:prstGeom prst="rect">
             <a:avLst/>
@@ -7153,7 +7645,7 @@
                 <a:ea typeface="Calibri" pitchFamily="34" charset="-122"/>
                 <a:cs typeface="Calibri" pitchFamily="34" charset="-120"/>
               </a:rPr>
-              <a:t>Audit trail</a:t>
+              <a:t>MCP server</a:t>
             </a:r>
             <a:endParaRPr lang="en-US" sz="1500" dirty="0"/>
           </a:p>
@@ -7168,7 +7660,7 @@
         <p:spPr>
           <a:xfrm>
             <a:off x="896112" y="2450592"/>
-            <a:ext cx="3012338" cy="1335024"/>
+            <a:ext cx="3012338" cy="3566160"/>
           </a:xfrm>
           <a:prstGeom prst="rect">
             <a:avLst/>
@@ -7198,7 +7690,7 @@
                 <a:ea typeface="Calibri" pitchFamily="34" charset="-122"/>
                 <a:cs typeface="Calibri" pitchFamily="34" charset="-120"/>
               </a:rPr>
-              <a:t>Append-only entry per call: hashes, model version, timestamp, duration.</a:t>
+              <a:t>All 9 SF primitives — including the prospectus parser itself — exposed as a governed MCP server with typed I/O + the evidence pack, consumable on any MCP host.</a:t>
             </a:r>
             <a:endParaRPr lang="en-US" sz="1250" dirty="0"/>
           </a:p>
@@ -7213,11 +7705,11 @@
         <p:spPr>
           <a:xfrm>
             <a:off x="4338218" y="1828800"/>
-            <a:ext cx="3515258" cy="2066544"/>
+            <a:ext cx="3515258" cy="4297680"/>
           </a:xfrm>
           <a:prstGeom prst="roundRect">
             <a:avLst>
-              <a:gd name="adj" fmla="val 2212"/>
+              <a:gd name="adj" fmla="val 1301"/>
             </a:avLst>
           </a:prstGeom>
           <a:solidFill>
@@ -7247,13 +7739,13 @@
         <p:spPr>
           <a:xfrm>
             <a:off x="4338218" y="1828800"/>
-            <a:ext cx="82296" cy="2066544"/>
+            <a:ext cx="82296" cy="4297680"/>
           </a:xfrm>
           <a:prstGeom prst="rect">
             <a:avLst/>
           </a:prstGeom>
           <a:solidFill>
-            <a:srgbClr val="2B59D6"/>
+            <a:srgbClr val="129E8F"/>
           </a:solidFill>
           <a:ln/>
         </p:spPr>
@@ -7294,7 +7786,7 @@
                 <a:ea typeface="Calibri" pitchFamily="34" charset="-122"/>
                 <a:cs typeface="Calibri" pitchFamily="34" charset="-120"/>
               </a:rPr>
-              <a:t>Confidence scoring</a:t>
+              <a:t>Deal = data, not code</a:t>
             </a:r>
             <a:endParaRPr lang="en-US" sz="1500" dirty="0"/>
           </a:p>
@@ -7309,7 +7801,7 @@
         <p:spPr>
           <a:xfrm>
             <a:off x="4594250" y="2450592"/>
-            <a:ext cx="3012338" cy="1335024"/>
+            <a:ext cx="3012338" cy="3566160"/>
           </a:xfrm>
           <a:prstGeom prst="rect">
             <a:avLst/>
@@ -7339,7 +7831,7 @@
                 <a:ea typeface="Calibri" pitchFamily="34" charset="-122"/>
                 <a:cs typeface="Calibri" pitchFamily="34" charset="-120"/>
               </a:rPr>
-              <a:t>Mandatory on every primitive — coverage · cross-ref · self-assessment.</a:t>
+              <a:t>Add a deal by dropping JSON into deals.json; no Python. The interpreter executes the deal's extracted model, not hardcoded logic.</a:t>
             </a:r>
             <a:endParaRPr lang="en-US" sz="1250" dirty="0"/>
           </a:p>
@@ -7354,11 +7846,11 @@
         <p:spPr>
           <a:xfrm>
             <a:off x="8036357" y="1828800"/>
-            <a:ext cx="3515258" cy="2066544"/>
+            <a:ext cx="3515258" cy="4297680"/>
           </a:xfrm>
           <a:prstGeom prst="roundRect">
             <a:avLst>
-              <a:gd name="adj" fmla="val 2212"/>
+              <a:gd name="adj" fmla="val 1301"/>
             </a:avLst>
           </a:prstGeom>
           <a:solidFill>
@@ -7388,13 +7880,13 @@
         <p:spPr>
           <a:xfrm>
             <a:off x="8036357" y="1828800"/>
-            <a:ext cx="82296" cy="2066544"/>
+            <a:ext cx="82296" cy="4297680"/>
           </a:xfrm>
           <a:prstGeom prst="rect">
             <a:avLst/>
           </a:prstGeom>
           <a:solidFill>
-            <a:srgbClr val="2B59D6"/>
+            <a:srgbClr val="1B2A4A"/>
           </a:solidFill>
           <a:ln/>
         </p:spPr>
@@ -7435,7 +7927,7 @@
                 <a:ea typeface="Calibri" pitchFamily="34" charset="-122"/>
                 <a:cs typeface="Calibri" pitchFamily="34" charset="-120"/>
               </a:rPr>
-              <a:t>Verbatim citations</a:t>
+              <a:t>Open &amp; portable</a:t>
             </a:r>
             <a:endParaRPr lang="en-US" sz="1500" dirty="0"/>
           </a:p>
@@ -7450,7 +7942,7 @@
         <p:spPr>
           <a:xfrm>
             <a:off x="8292389" y="2450592"/>
-            <a:ext cx="3012338" cy="1335024"/>
+            <a:ext cx="3012338" cy="3566160"/>
           </a:xfrm>
           <a:prstGeom prst="rect">
             <a:avLst/>
@@ -7480,430 +7972,7 @@
                 <a:ea typeface="Calibri" pitchFamily="34" charset="-122"/>
                 <a:cs typeface="Calibri" pitchFamily="34" charset="-120"/>
               </a:rPr>
-              <a:t>Every fact grounded to a section + excerpt a reviewer can locate.</a:t>
-            </a:r>
-            <a:endParaRPr lang="en-US" sz="1250" dirty="0"/>
-          </a:p>
-        </p:txBody>
-      </p:sp>
-      <p:sp>
-        <p:nvSpPr>
-          <p:cNvPr id="20" name="Shape 18"/>
-          <p:cNvSpPr/>
-          <p:nvPr/>
-        </p:nvSpPr>
-        <p:spPr>
-          <a:xfrm>
-            <a:off x="640080" y="4059936"/>
-            <a:ext cx="3515258" cy="2066544"/>
-          </a:xfrm>
-          <a:prstGeom prst="roundRect">
-            <a:avLst>
-              <a:gd name="adj" fmla="val 2212"/>
-            </a:avLst>
-          </a:prstGeom>
-          <a:solidFill>
-            <a:srgbClr val="F4F7FB"/>
-          </a:solidFill>
-          <a:ln w="12700">
-            <a:solidFill>
-              <a:srgbClr val="DDE4EE"/>
-            </a:solidFill>
-            <a:prstDash val="solid"/>
-          </a:ln>
-          <a:effectLst>
-            <a:outerShdw sx="100000" sy="100000" kx="0" ky="0" algn="bl" rotWithShape="0" blurRad="88900" dist="38100" dir="5400000">
-              <a:srgbClr val="1B2A4A">
-                <a:alpha val="12000"/>
-              </a:srgbClr>
-            </a:outerShdw>
-          </a:effectLst>
-        </p:spPr>
-      </p:sp>
-      <p:sp>
-        <p:nvSpPr>
-          <p:cNvPr id="21" name="Shape 19"/>
-          <p:cNvSpPr/>
-          <p:nvPr/>
-        </p:nvSpPr>
-        <p:spPr>
-          <a:xfrm>
-            <a:off x="640080" y="4059936"/>
-            <a:ext cx="82296" cy="2066544"/>
-          </a:xfrm>
-          <a:prstGeom prst="rect">
-            <a:avLst/>
-          </a:prstGeom>
-          <a:solidFill>
-            <a:srgbClr val="2B59D6"/>
-          </a:solidFill>
-          <a:ln/>
-        </p:spPr>
-      </p:sp>
-      <p:sp>
-        <p:nvSpPr>
-          <p:cNvPr id="22" name="Text 20"/>
-          <p:cNvSpPr/>
-          <p:nvPr/>
-        </p:nvSpPr>
-        <p:spPr>
-          <a:xfrm>
-            <a:off x="896112" y="4261104"/>
-            <a:ext cx="3058058" cy="365760"/>
-          </a:xfrm>
-          <a:prstGeom prst="rect">
-            <a:avLst/>
-          </a:prstGeom>
-          <a:noFill/>
-          <a:ln/>
-        </p:spPr>
-        <p:txBody>
-          <a:bodyPr wrap="square" lIns="0" tIns="0" rIns="0" bIns="0" rtlCol="0" anchor="t"/>
-          <a:lstStyle/>
-          <a:p>
-            <a:pPr algn="l" indent="0" marL="0">
-              <a:lnSpc>
-                <a:spcPct val="100000"/>
-              </a:lnSpc>
-              <a:buNone/>
-            </a:pPr>
-            <a:r>
-              <a:rPr lang="en-US" sz="1500" b="1" dirty="0">
-                <a:solidFill>
-                  <a:srgbClr val="1B2A4A"/>
-                </a:solidFill>
-                <a:latin typeface="Calibri" pitchFamily="34" charset="0"/>
-                <a:ea typeface="Calibri" pitchFamily="34" charset="-122"/>
-                <a:cs typeface="Calibri" pitchFamily="34" charset="-120"/>
-              </a:rPr>
-              <a:t>Data provenance</a:t>
-            </a:r>
-            <a:endParaRPr lang="en-US" sz="1500" dirty="0"/>
-          </a:p>
-        </p:txBody>
-      </p:sp>
-      <p:sp>
-        <p:nvSpPr>
-          <p:cNvPr id="23" name="Text 21"/>
-          <p:cNvSpPr/>
-          <p:nvPr/>
-        </p:nvSpPr>
-        <p:spPr>
-          <a:xfrm>
-            <a:off x="896112" y="4681728"/>
-            <a:ext cx="3012338" cy="1335024"/>
-          </a:xfrm>
-          <a:prstGeom prst="rect">
-            <a:avLst/>
-          </a:prstGeom>
-          <a:noFill/>
-          <a:ln/>
-        </p:spPr>
-        <p:txBody>
-          <a:bodyPr wrap="square" lIns="0" tIns="0" rIns="0" bIns="0" rtlCol="0" anchor="t"/>
-          <a:lstStyle/>
-          <a:p>
-            <a:pPr algn="l" indent="0" marL="0">
-              <a:lnSpc>
-                <a:spcPct val="106000"/>
-              </a:lnSpc>
-              <a:spcAft>
-                <a:spcPts val="300"/>
-              </a:spcAft>
-              <a:buNone/>
-            </a:pPr>
-            <a:r>
-              <a:rPr lang="en-US" sz="1250" dirty="0">
-                <a:solidFill>
-                  <a:srgbClr val="536177"/>
-                </a:solidFill>
-                <a:latin typeface="Calibri" pitchFamily="34" charset="0"/>
-                <a:ea typeface="Calibri" pitchFamily="34" charset="-122"/>
-                <a:cs typeface="Calibri" pitchFamily="34" charset="-120"/>
-              </a:rPr>
-              <a:t>Each tape tagged deeploans vs direct, carried into the evidence pack.</a:t>
-            </a:r>
-            <a:endParaRPr lang="en-US" sz="1250" dirty="0"/>
-          </a:p>
-        </p:txBody>
-      </p:sp>
-      <p:sp>
-        <p:nvSpPr>
-          <p:cNvPr id="24" name="Shape 22"/>
-          <p:cNvSpPr/>
-          <p:nvPr/>
-        </p:nvSpPr>
-        <p:spPr>
-          <a:xfrm>
-            <a:off x="4338218" y="4059936"/>
-            <a:ext cx="3515258" cy="2066544"/>
-          </a:xfrm>
-          <a:prstGeom prst="roundRect">
-            <a:avLst>
-              <a:gd name="adj" fmla="val 2212"/>
-            </a:avLst>
-          </a:prstGeom>
-          <a:solidFill>
-            <a:srgbClr val="F4F7FB"/>
-          </a:solidFill>
-          <a:ln w="12700">
-            <a:solidFill>
-              <a:srgbClr val="DDE4EE"/>
-            </a:solidFill>
-            <a:prstDash val="solid"/>
-          </a:ln>
-          <a:effectLst>
-            <a:outerShdw sx="100000" sy="100000" kx="0" ky="0" algn="bl" rotWithShape="0" blurRad="88900" dist="38100" dir="5400000">
-              <a:srgbClr val="1B2A4A">
-                <a:alpha val="12000"/>
-              </a:srgbClr>
-            </a:outerShdw>
-          </a:effectLst>
-        </p:spPr>
-      </p:sp>
-      <p:sp>
-        <p:nvSpPr>
-          <p:cNvPr id="25" name="Shape 23"/>
-          <p:cNvSpPr/>
-          <p:nvPr/>
-        </p:nvSpPr>
-        <p:spPr>
-          <a:xfrm>
-            <a:off x="4338218" y="4059936"/>
-            <a:ext cx="82296" cy="2066544"/>
-          </a:xfrm>
-          <a:prstGeom prst="rect">
-            <a:avLst/>
-          </a:prstGeom>
-          <a:solidFill>
-            <a:srgbClr val="2B59D6"/>
-          </a:solidFill>
-          <a:ln/>
-        </p:spPr>
-      </p:sp>
-      <p:sp>
-        <p:nvSpPr>
-          <p:cNvPr id="26" name="Text 24"/>
-          <p:cNvSpPr/>
-          <p:nvPr/>
-        </p:nvSpPr>
-        <p:spPr>
-          <a:xfrm>
-            <a:off x="4594250" y="4261104"/>
-            <a:ext cx="3058058" cy="365760"/>
-          </a:xfrm>
-          <a:prstGeom prst="rect">
-            <a:avLst/>
-          </a:prstGeom>
-          <a:noFill/>
-          <a:ln/>
-        </p:spPr>
-        <p:txBody>
-          <a:bodyPr wrap="square" lIns="0" tIns="0" rIns="0" bIns="0" rtlCol="0" anchor="t"/>
-          <a:lstStyle/>
-          <a:p>
-            <a:pPr algn="l" indent="0" marL="0">
-              <a:lnSpc>
-                <a:spcPct val="100000"/>
-              </a:lnSpc>
-              <a:buNone/>
-            </a:pPr>
-            <a:r>
-              <a:rPr lang="en-US" sz="1500" b="1" dirty="0">
-                <a:solidFill>
-                  <a:srgbClr val="1B2A4A"/>
-                </a:solidFill>
-                <a:latin typeface="Calibri" pitchFamily="34" charset="0"/>
-                <a:ea typeface="Calibri" pitchFamily="34" charset="-122"/>
-                <a:cs typeface="Calibri" pitchFamily="34" charset="-120"/>
-              </a:rPr>
-              <a:t>Human-review routing</a:t>
-            </a:r>
-            <a:endParaRPr lang="en-US" sz="1500" dirty="0"/>
-          </a:p>
-        </p:txBody>
-      </p:sp>
-      <p:sp>
-        <p:nvSpPr>
-          <p:cNvPr id="27" name="Text 25"/>
-          <p:cNvSpPr/>
-          <p:nvPr/>
-        </p:nvSpPr>
-        <p:spPr>
-          <a:xfrm>
-            <a:off x="4594250" y="4681728"/>
-            <a:ext cx="3012338" cy="1335024"/>
-          </a:xfrm>
-          <a:prstGeom prst="rect">
-            <a:avLst/>
-          </a:prstGeom>
-          <a:noFill/>
-          <a:ln/>
-        </p:spPr>
-        <p:txBody>
-          <a:bodyPr wrap="square" lIns="0" tIns="0" rIns="0" bIns="0" rtlCol="0" anchor="t"/>
-          <a:lstStyle/>
-          <a:p>
-            <a:pPr algn="l" indent="0" marL="0">
-              <a:lnSpc>
-                <a:spcPct val="106000"/>
-              </a:lnSpc>
-              <a:spcAft>
-                <a:spcPts val="300"/>
-              </a:spcAft>
-              <a:buNone/>
-            </a:pPr>
-            <a:r>
-              <a:rPr lang="en-US" sz="1250" dirty="0">
-                <a:solidFill>
-                  <a:srgbClr val="536177"/>
-                </a:solidFill>
-                <a:latin typeface="Calibri" pitchFamily="34" charset="0"/>
-                <a:ea typeface="Calibri" pitchFamily="34" charset="-122"/>
-                <a:cs typeface="Calibri" pitchFamily="34" charset="-120"/>
-              </a:rPr>
-              <a:t>Confidence &lt; 0.70 → flagged; output can't be used until signed off.</a:t>
-            </a:r>
-            <a:endParaRPr lang="en-US" sz="1250" dirty="0"/>
-          </a:p>
-        </p:txBody>
-      </p:sp>
-      <p:sp>
-        <p:nvSpPr>
-          <p:cNvPr id="28" name="Shape 26"/>
-          <p:cNvSpPr/>
-          <p:nvPr/>
-        </p:nvSpPr>
-        <p:spPr>
-          <a:xfrm>
-            <a:off x="8036357" y="4059936"/>
-            <a:ext cx="3515258" cy="2066544"/>
-          </a:xfrm>
-          <a:prstGeom prst="roundRect">
-            <a:avLst>
-              <a:gd name="adj" fmla="val 2212"/>
-            </a:avLst>
-          </a:prstGeom>
-          <a:solidFill>
-            <a:srgbClr val="F4F7FB"/>
-          </a:solidFill>
-          <a:ln w="12700">
-            <a:solidFill>
-              <a:srgbClr val="DDE4EE"/>
-            </a:solidFill>
-            <a:prstDash val="solid"/>
-          </a:ln>
-          <a:effectLst>
-            <a:outerShdw sx="100000" sy="100000" kx="0" ky="0" algn="bl" rotWithShape="0" blurRad="88900" dist="38100" dir="5400000">
-              <a:srgbClr val="1B2A4A">
-                <a:alpha val="12000"/>
-              </a:srgbClr>
-            </a:outerShdw>
-          </a:effectLst>
-        </p:spPr>
-      </p:sp>
-      <p:sp>
-        <p:nvSpPr>
-          <p:cNvPr id="29" name="Shape 27"/>
-          <p:cNvSpPr/>
-          <p:nvPr/>
-        </p:nvSpPr>
-        <p:spPr>
-          <a:xfrm>
-            <a:off x="8036357" y="4059936"/>
-            <a:ext cx="82296" cy="2066544"/>
-          </a:xfrm>
-          <a:prstGeom prst="rect">
-            <a:avLst/>
-          </a:prstGeom>
-          <a:solidFill>
-            <a:srgbClr val="2B59D6"/>
-          </a:solidFill>
-          <a:ln/>
-        </p:spPr>
-      </p:sp>
-      <p:sp>
-        <p:nvSpPr>
-          <p:cNvPr id="30" name="Text 28"/>
-          <p:cNvSpPr/>
-          <p:nvPr/>
-        </p:nvSpPr>
-        <p:spPr>
-          <a:xfrm>
-            <a:off x="8292389" y="4261104"/>
-            <a:ext cx="3058058" cy="365760"/>
-          </a:xfrm>
-          <a:prstGeom prst="rect">
-            <a:avLst/>
-          </a:prstGeom>
-          <a:noFill/>
-          <a:ln/>
-        </p:spPr>
-        <p:txBody>
-          <a:bodyPr wrap="square" lIns="0" tIns="0" rIns="0" bIns="0" rtlCol="0" anchor="t"/>
-          <a:lstStyle/>
-          <a:p>
-            <a:pPr algn="l" indent="0" marL="0">
-              <a:lnSpc>
-                <a:spcPct val="100000"/>
-              </a:lnSpc>
-              <a:buNone/>
-            </a:pPr>
-            <a:r>
-              <a:rPr lang="en-US" sz="1500" b="1" dirty="0">
-                <a:solidFill>
-                  <a:srgbClr val="1B2A4A"/>
-                </a:solidFill>
-                <a:latin typeface="Calibri" pitchFamily="34" charset="0"/>
-                <a:ea typeface="Calibri" pitchFamily="34" charset="-122"/>
-                <a:cs typeface="Calibri" pitchFamily="34" charset="-120"/>
-              </a:rPr>
-              <a:t>Model-risk class</a:t>
-            </a:r>
-            <a:endParaRPr lang="en-US" sz="1500" dirty="0"/>
-          </a:p>
-        </p:txBody>
-      </p:sp>
-      <p:sp>
-        <p:nvSpPr>
-          <p:cNvPr id="31" name="Text 29"/>
-          <p:cNvSpPr/>
-          <p:nvPr/>
-        </p:nvSpPr>
-        <p:spPr>
-          <a:xfrm>
-            <a:off x="8292389" y="4681728"/>
-            <a:ext cx="3012338" cy="1335024"/>
-          </a:xfrm>
-          <a:prstGeom prst="rect">
-            <a:avLst/>
-          </a:prstGeom>
-          <a:noFill/>
-          <a:ln/>
-        </p:spPr>
-        <p:txBody>
-          <a:bodyPr wrap="square" lIns="0" tIns="0" rIns="0" bIns="0" rtlCol="0" anchor="t"/>
-          <a:lstStyle/>
-          <a:p>
-            <a:pPr algn="l" indent="0" marL="0">
-              <a:lnSpc>
-                <a:spcPct val="106000"/>
-              </a:lnSpc>
-              <a:spcAft>
-                <a:spcPts val="300"/>
-              </a:spcAft>
-              <a:buNone/>
-            </a:pPr>
-            <a:r>
-              <a:rPr lang="en-US" sz="1250" dirty="0">
-                <a:solidFill>
-                  <a:srgbClr val="536177"/>
-                </a:solidFill>
-                <a:latin typeface="Calibri" pitchFamily="34" charset="0"/>
-                <a:ea typeface="Calibri" pitchFamily="34" charset="-122"/>
-                <a:cs typeface="Calibri" pitchFamily="34" charset="-120"/>
-              </a:rPr>
-              <a:t>Decision-support tier, zero autonomy — outputs are inputs, never actions.</a:t>
+              <a:t>Apache-2.0; CSV or parquet tapes; either deeploans (Algoritmica's ESMA ETL) or a direct read — selectable per deal. This demo runs direct; the deeploans path is wired but its backend isn't stood up here.</a:t>
             </a:r>
             <a:endParaRPr lang="en-US" sz="1250" dirty="0"/>
           </a:p>
@@ -7997,7 +8066,7 @@
                 <a:ea typeface="Calibri" pitchFamily="34" charset="-122"/>
                 <a:cs typeface="Calibri" pitchFamily="34" charset="-120"/>
               </a:rPr>
-              <a:t>WHAT WE BUILT — THE DASHBOARD</a:t>
+              <a:t>TRUST — FINOS AI GOVERNANCE FRAMEWORK + DEEPLOANS</a:t>
             </a:r>
             <a:endParaRPr lang="en-US" sz="1200" dirty="0"/>
           </a:p>
@@ -8039,7 +8108,7 @@
                 <a:ea typeface="Calibri" pitchFamily="34" charset="-122"/>
                 <a:cs typeface="Calibri" pitchFamily="34" charset="-120"/>
               </a:rPr>
-              <a:t>Two layers, one product</a:t>
+              <a:t>Governance is baked into the interface</a:t>
             </a:r>
             <a:endParaRPr lang="en-US" sz="2800" dirty="0"/>
           </a:p>
@@ -8175,11 +8244,11 @@
         <p:spPr>
           <a:xfrm>
             <a:off x="640080" y="1828800"/>
-            <a:ext cx="5364328" cy="4297680"/>
+            <a:ext cx="3515258" cy="2066544"/>
           </a:xfrm>
           <a:prstGeom prst="roundRect">
             <a:avLst>
-              <a:gd name="adj" fmla="val 1064"/>
+              <a:gd name="adj" fmla="val 2212"/>
             </a:avLst>
           </a:prstGeom>
           <a:solidFill>
@@ -8209,13 +8278,13 @@
         <p:spPr>
           <a:xfrm>
             <a:off x="640080" y="1828800"/>
-            <a:ext cx="82296" cy="4297680"/>
+            <a:ext cx="82296" cy="2066544"/>
           </a:xfrm>
           <a:prstGeom prst="rect">
             <a:avLst/>
           </a:prstGeom>
           <a:solidFill>
-            <a:srgbClr val="1B2A4A"/>
+            <a:srgbClr val="2B59D6"/>
           </a:solidFill>
           <a:ln/>
         </p:spPr>
@@ -8229,7 +8298,7 @@
         <p:spPr>
           <a:xfrm>
             <a:off x="896112" y="2029968"/>
-            <a:ext cx="4907128" cy="365760"/>
+            <a:ext cx="3058058" cy="365760"/>
           </a:xfrm>
           <a:prstGeom prst="rect">
             <a:avLst/>
@@ -8256,7 +8325,7 @@
                 <a:ea typeface="Calibri" pitchFamily="34" charset="-122"/>
                 <a:cs typeface="Calibri" pitchFamily="34" charset="-120"/>
               </a:rPr>
-              <a:t>Deal Analytics</a:t>
+              <a:t>Audit trail</a:t>
             </a:r>
             <a:endParaRPr lang="en-US" sz="1500" dirty="0"/>
           </a:p>
@@ -8271,7 +8340,7 @@
         <p:spPr>
           <a:xfrm>
             <a:off x="896112" y="2450592"/>
-            <a:ext cx="4861408" cy="3566160"/>
+            <a:ext cx="3012338" cy="1335024"/>
           </a:xfrm>
           <a:prstGeom prst="rect">
             <a:avLst/>
@@ -8301,7 +8370,7 @@
                 <a:ea typeface="Calibri" pitchFamily="34" charset="-122"/>
                 <a:cs typeface="Calibri" pitchFamily="34" charset="-120"/>
               </a:rPr>
-              <a:t>Overview · Pool &amp; Performance · Waterfall · Compliance · Projection — the per-deal analyst workflow over the extracted model.</a:t>
+              <a:t>Append-only entry per call: hashes, model version, timestamp, duration.</a:t>
             </a:r>
             <a:endParaRPr lang="en-US" sz="1250" dirty="0"/>
           </a:p>
@@ -8315,12 +8384,12 @@
         </p:nvSpPr>
         <p:spPr>
           <a:xfrm>
-            <a:off x="6187288" y="1828800"/>
-            <a:ext cx="5364328" cy="4297680"/>
+            <a:off x="4338218" y="1828800"/>
+            <a:ext cx="3515258" cy="2066544"/>
           </a:xfrm>
           <a:prstGeom prst="roundRect">
             <a:avLst>
-              <a:gd name="adj" fmla="val 1064"/>
+              <a:gd name="adj" fmla="val 2212"/>
             </a:avLst>
           </a:prstGeom>
           <a:solidFill>
@@ -8349,8 +8418,8 @@
         </p:nvSpPr>
         <p:spPr>
           <a:xfrm>
-            <a:off x="6187288" y="1828800"/>
-            <a:ext cx="82296" cy="4297680"/>
+            <a:off x="4338218" y="1828800"/>
+            <a:ext cx="82296" cy="2066544"/>
           </a:xfrm>
           <a:prstGeom prst="rect">
             <a:avLst/>
@@ -8369,8 +8438,8 @@
         </p:nvSpPr>
         <p:spPr>
           <a:xfrm>
-            <a:off x="6443320" y="2029968"/>
-            <a:ext cx="4907128" cy="365760"/>
+            <a:off x="4594250" y="2029968"/>
+            <a:ext cx="3058058" cy="365760"/>
           </a:xfrm>
           <a:prstGeom prst="rect">
             <a:avLst/>
@@ -8397,7 +8466,7 @@
                 <a:ea typeface="Calibri" pitchFamily="34" charset="-122"/>
                 <a:cs typeface="Calibri" pitchFamily="34" charset="-120"/>
               </a:rPr>
-              <a:t>Platform &amp; Governance</a:t>
+              <a:t>Confidence scoring</a:t>
             </a:r>
             <a:endParaRPr lang="en-US" sz="1500" dirty="0"/>
           </a:p>
@@ -8411,8 +8480,8 @@
         </p:nvSpPr>
         <p:spPr>
           <a:xfrm>
-            <a:off x="6443320" y="2450592"/>
-            <a:ext cx="4861408" cy="3566160"/>
+            <a:off x="4594250" y="2450592"/>
+            <a:ext cx="3012338" cy="1335024"/>
           </a:xfrm>
           <a:prstGeom prst="rect">
             <a:avLst/>
@@ -8442,7 +8511,571 @@
                 <a:ea typeface="Calibri" pitchFamily="34" charset="-122"/>
                 <a:cs typeface="Calibri" pitchFamily="34" charset="-120"/>
               </a:rPr>
-              <a:t>Showcase · Validation · Framework · Governance — the cross-deal, trust &amp; reusability layer that headlines the work.</a:t>
+              <a:t>Mandatory on every primitive — coverage · cross-ref · self-assessment.</a:t>
+            </a:r>
+            <a:endParaRPr lang="en-US" sz="1250" dirty="0"/>
+          </a:p>
+        </p:txBody>
+      </p:sp>
+      <p:sp>
+        <p:nvSpPr>
+          <p:cNvPr id="16" name="Shape 14"/>
+          <p:cNvSpPr/>
+          <p:nvPr/>
+        </p:nvSpPr>
+        <p:spPr>
+          <a:xfrm>
+            <a:off x="8036357" y="1828800"/>
+            <a:ext cx="3515258" cy="2066544"/>
+          </a:xfrm>
+          <a:prstGeom prst="roundRect">
+            <a:avLst>
+              <a:gd name="adj" fmla="val 2212"/>
+            </a:avLst>
+          </a:prstGeom>
+          <a:solidFill>
+            <a:srgbClr val="F4F7FB"/>
+          </a:solidFill>
+          <a:ln w="12700">
+            <a:solidFill>
+              <a:srgbClr val="DDE4EE"/>
+            </a:solidFill>
+            <a:prstDash val="solid"/>
+          </a:ln>
+          <a:effectLst>
+            <a:outerShdw sx="100000" sy="100000" kx="0" ky="0" algn="bl" rotWithShape="0" blurRad="88900" dist="38100" dir="5400000">
+              <a:srgbClr val="1B2A4A">
+                <a:alpha val="12000"/>
+              </a:srgbClr>
+            </a:outerShdw>
+          </a:effectLst>
+        </p:spPr>
+      </p:sp>
+      <p:sp>
+        <p:nvSpPr>
+          <p:cNvPr id="17" name="Shape 15"/>
+          <p:cNvSpPr/>
+          <p:nvPr/>
+        </p:nvSpPr>
+        <p:spPr>
+          <a:xfrm>
+            <a:off x="8036357" y="1828800"/>
+            <a:ext cx="82296" cy="2066544"/>
+          </a:xfrm>
+          <a:prstGeom prst="rect">
+            <a:avLst/>
+          </a:prstGeom>
+          <a:solidFill>
+            <a:srgbClr val="2B59D6"/>
+          </a:solidFill>
+          <a:ln/>
+        </p:spPr>
+      </p:sp>
+      <p:sp>
+        <p:nvSpPr>
+          <p:cNvPr id="18" name="Text 16"/>
+          <p:cNvSpPr/>
+          <p:nvPr/>
+        </p:nvSpPr>
+        <p:spPr>
+          <a:xfrm>
+            <a:off x="8292389" y="2029968"/>
+            <a:ext cx="3058058" cy="365760"/>
+          </a:xfrm>
+          <a:prstGeom prst="rect">
+            <a:avLst/>
+          </a:prstGeom>
+          <a:noFill/>
+          <a:ln/>
+        </p:spPr>
+        <p:txBody>
+          <a:bodyPr wrap="square" lIns="0" tIns="0" rIns="0" bIns="0" rtlCol="0" anchor="t"/>
+          <a:lstStyle/>
+          <a:p>
+            <a:pPr algn="l" indent="0" marL="0">
+              <a:lnSpc>
+                <a:spcPct val="100000"/>
+              </a:lnSpc>
+              <a:buNone/>
+            </a:pPr>
+            <a:r>
+              <a:rPr lang="en-US" sz="1500" b="1" dirty="0">
+                <a:solidFill>
+                  <a:srgbClr val="1B2A4A"/>
+                </a:solidFill>
+                <a:latin typeface="Calibri" pitchFamily="34" charset="0"/>
+                <a:ea typeface="Calibri" pitchFamily="34" charset="-122"/>
+                <a:cs typeface="Calibri" pitchFamily="34" charset="-120"/>
+              </a:rPr>
+              <a:t>Verbatim citations</a:t>
+            </a:r>
+            <a:endParaRPr lang="en-US" sz="1500" dirty="0"/>
+          </a:p>
+        </p:txBody>
+      </p:sp>
+      <p:sp>
+        <p:nvSpPr>
+          <p:cNvPr id="19" name="Text 17"/>
+          <p:cNvSpPr/>
+          <p:nvPr/>
+        </p:nvSpPr>
+        <p:spPr>
+          <a:xfrm>
+            <a:off x="8292389" y="2450592"/>
+            <a:ext cx="3012338" cy="1335024"/>
+          </a:xfrm>
+          <a:prstGeom prst="rect">
+            <a:avLst/>
+          </a:prstGeom>
+          <a:noFill/>
+          <a:ln/>
+        </p:spPr>
+        <p:txBody>
+          <a:bodyPr wrap="square" lIns="0" tIns="0" rIns="0" bIns="0" rtlCol="0" anchor="t"/>
+          <a:lstStyle/>
+          <a:p>
+            <a:pPr algn="l" indent="0" marL="0">
+              <a:lnSpc>
+                <a:spcPct val="106000"/>
+              </a:lnSpc>
+              <a:spcAft>
+                <a:spcPts val="300"/>
+              </a:spcAft>
+              <a:buNone/>
+            </a:pPr>
+            <a:r>
+              <a:rPr lang="en-US" sz="1250" dirty="0">
+                <a:solidFill>
+                  <a:srgbClr val="536177"/>
+                </a:solidFill>
+                <a:latin typeface="Calibri" pitchFamily="34" charset="0"/>
+                <a:ea typeface="Calibri" pitchFamily="34" charset="-122"/>
+                <a:cs typeface="Calibri" pitchFamily="34" charset="-120"/>
+              </a:rPr>
+              <a:t>Every fact grounded to a section + excerpt a reviewer can locate.</a:t>
+            </a:r>
+            <a:endParaRPr lang="en-US" sz="1250" dirty="0"/>
+          </a:p>
+        </p:txBody>
+      </p:sp>
+      <p:sp>
+        <p:nvSpPr>
+          <p:cNvPr id="20" name="Shape 18"/>
+          <p:cNvSpPr/>
+          <p:nvPr/>
+        </p:nvSpPr>
+        <p:spPr>
+          <a:xfrm>
+            <a:off x="640080" y="4059936"/>
+            <a:ext cx="3515258" cy="2066544"/>
+          </a:xfrm>
+          <a:prstGeom prst="roundRect">
+            <a:avLst>
+              <a:gd name="adj" fmla="val 2212"/>
+            </a:avLst>
+          </a:prstGeom>
+          <a:solidFill>
+            <a:srgbClr val="F4F7FB"/>
+          </a:solidFill>
+          <a:ln w="12700">
+            <a:solidFill>
+              <a:srgbClr val="DDE4EE"/>
+            </a:solidFill>
+            <a:prstDash val="solid"/>
+          </a:ln>
+          <a:effectLst>
+            <a:outerShdw sx="100000" sy="100000" kx="0" ky="0" algn="bl" rotWithShape="0" blurRad="88900" dist="38100" dir="5400000">
+              <a:srgbClr val="1B2A4A">
+                <a:alpha val="12000"/>
+              </a:srgbClr>
+            </a:outerShdw>
+          </a:effectLst>
+        </p:spPr>
+      </p:sp>
+      <p:sp>
+        <p:nvSpPr>
+          <p:cNvPr id="21" name="Shape 19"/>
+          <p:cNvSpPr/>
+          <p:nvPr/>
+        </p:nvSpPr>
+        <p:spPr>
+          <a:xfrm>
+            <a:off x="640080" y="4059936"/>
+            <a:ext cx="82296" cy="2066544"/>
+          </a:xfrm>
+          <a:prstGeom prst="rect">
+            <a:avLst/>
+          </a:prstGeom>
+          <a:solidFill>
+            <a:srgbClr val="2B59D6"/>
+          </a:solidFill>
+          <a:ln/>
+        </p:spPr>
+      </p:sp>
+      <p:sp>
+        <p:nvSpPr>
+          <p:cNvPr id="22" name="Text 20"/>
+          <p:cNvSpPr/>
+          <p:nvPr/>
+        </p:nvSpPr>
+        <p:spPr>
+          <a:xfrm>
+            <a:off x="896112" y="4261104"/>
+            <a:ext cx="3058058" cy="365760"/>
+          </a:xfrm>
+          <a:prstGeom prst="rect">
+            <a:avLst/>
+          </a:prstGeom>
+          <a:noFill/>
+          <a:ln/>
+        </p:spPr>
+        <p:txBody>
+          <a:bodyPr wrap="square" lIns="0" tIns="0" rIns="0" bIns="0" rtlCol="0" anchor="t"/>
+          <a:lstStyle/>
+          <a:p>
+            <a:pPr algn="l" indent="0" marL="0">
+              <a:lnSpc>
+                <a:spcPct val="100000"/>
+              </a:lnSpc>
+              <a:buNone/>
+            </a:pPr>
+            <a:r>
+              <a:rPr lang="en-US" sz="1500" b="1" dirty="0">
+                <a:solidFill>
+                  <a:srgbClr val="1B2A4A"/>
+                </a:solidFill>
+                <a:latin typeface="Calibri" pitchFamily="34" charset="0"/>
+                <a:ea typeface="Calibri" pitchFamily="34" charset="-122"/>
+                <a:cs typeface="Calibri" pitchFamily="34" charset="-120"/>
+              </a:rPr>
+              <a:t>Data provenance</a:t>
+            </a:r>
+            <a:endParaRPr lang="en-US" sz="1500" dirty="0"/>
+          </a:p>
+        </p:txBody>
+      </p:sp>
+      <p:sp>
+        <p:nvSpPr>
+          <p:cNvPr id="23" name="Text 21"/>
+          <p:cNvSpPr/>
+          <p:nvPr/>
+        </p:nvSpPr>
+        <p:spPr>
+          <a:xfrm>
+            <a:off x="896112" y="4681728"/>
+            <a:ext cx="3012338" cy="1335024"/>
+          </a:xfrm>
+          <a:prstGeom prst="rect">
+            <a:avLst/>
+          </a:prstGeom>
+          <a:noFill/>
+          <a:ln/>
+        </p:spPr>
+        <p:txBody>
+          <a:bodyPr wrap="square" lIns="0" tIns="0" rIns="0" bIns="0" rtlCol="0" anchor="t"/>
+          <a:lstStyle/>
+          <a:p>
+            <a:pPr algn="l" indent="0" marL="0">
+              <a:lnSpc>
+                <a:spcPct val="106000"/>
+              </a:lnSpc>
+              <a:spcAft>
+                <a:spcPts val="300"/>
+              </a:spcAft>
+              <a:buNone/>
+            </a:pPr>
+            <a:r>
+              <a:rPr lang="en-US" sz="1250" dirty="0">
+                <a:solidFill>
+                  <a:srgbClr val="536177"/>
+                </a:solidFill>
+                <a:latin typeface="Calibri" pitchFamily="34" charset="0"/>
+                <a:ea typeface="Calibri" pitchFamily="34" charset="-122"/>
+                <a:cs typeface="Calibri" pitchFamily="34" charset="-120"/>
+              </a:rPr>
+              <a:t>Every tape is tagged with its source — deeploans (the organiser's own ESMA ETL) or a direct read — and the tag travels into the evidence pack. This demo runs direct for infra reasons; the deeploans path is wired and selectable.</a:t>
+            </a:r>
+            <a:endParaRPr lang="en-US" sz="1250" dirty="0"/>
+          </a:p>
+        </p:txBody>
+      </p:sp>
+      <p:sp>
+        <p:nvSpPr>
+          <p:cNvPr id="24" name="Shape 22"/>
+          <p:cNvSpPr/>
+          <p:nvPr/>
+        </p:nvSpPr>
+        <p:spPr>
+          <a:xfrm>
+            <a:off x="4338218" y="4059936"/>
+            <a:ext cx="3515258" cy="2066544"/>
+          </a:xfrm>
+          <a:prstGeom prst="roundRect">
+            <a:avLst>
+              <a:gd name="adj" fmla="val 2212"/>
+            </a:avLst>
+          </a:prstGeom>
+          <a:solidFill>
+            <a:srgbClr val="F4F7FB"/>
+          </a:solidFill>
+          <a:ln w="12700">
+            <a:solidFill>
+              <a:srgbClr val="DDE4EE"/>
+            </a:solidFill>
+            <a:prstDash val="solid"/>
+          </a:ln>
+          <a:effectLst>
+            <a:outerShdw sx="100000" sy="100000" kx="0" ky="0" algn="bl" rotWithShape="0" blurRad="88900" dist="38100" dir="5400000">
+              <a:srgbClr val="1B2A4A">
+                <a:alpha val="12000"/>
+              </a:srgbClr>
+            </a:outerShdw>
+          </a:effectLst>
+        </p:spPr>
+      </p:sp>
+      <p:sp>
+        <p:nvSpPr>
+          <p:cNvPr id="25" name="Shape 23"/>
+          <p:cNvSpPr/>
+          <p:nvPr/>
+        </p:nvSpPr>
+        <p:spPr>
+          <a:xfrm>
+            <a:off x="4338218" y="4059936"/>
+            <a:ext cx="82296" cy="2066544"/>
+          </a:xfrm>
+          <a:prstGeom prst="rect">
+            <a:avLst/>
+          </a:prstGeom>
+          <a:solidFill>
+            <a:srgbClr val="2B59D6"/>
+          </a:solidFill>
+          <a:ln/>
+        </p:spPr>
+      </p:sp>
+      <p:sp>
+        <p:nvSpPr>
+          <p:cNvPr id="26" name="Text 24"/>
+          <p:cNvSpPr/>
+          <p:nvPr/>
+        </p:nvSpPr>
+        <p:spPr>
+          <a:xfrm>
+            <a:off x="4594250" y="4261104"/>
+            <a:ext cx="3058058" cy="365760"/>
+          </a:xfrm>
+          <a:prstGeom prst="rect">
+            <a:avLst/>
+          </a:prstGeom>
+          <a:noFill/>
+          <a:ln/>
+        </p:spPr>
+        <p:txBody>
+          <a:bodyPr wrap="square" lIns="0" tIns="0" rIns="0" bIns="0" rtlCol="0" anchor="t"/>
+          <a:lstStyle/>
+          <a:p>
+            <a:pPr algn="l" indent="0" marL="0">
+              <a:lnSpc>
+                <a:spcPct val="100000"/>
+              </a:lnSpc>
+              <a:buNone/>
+            </a:pPr>
+            <a:r>
+              <a:rPr lang="en-US" sz="1500" b="1" dirty="0">
+                <a:solidFill>
+                  <a:srgbClr val="1B2A4A"/>
+                </a:solidFill>
+                <a:latin typeface="Calibri" pitchFamily="34" charset="0"/>
+                <a:ea typeface="Calibri" pitchFamily="34" charset="-122"/>
+                <a:cs typeface="Calibri" pitchFamily="34" charset="-120"/>
+              </a:rPr>
+              <a:t>Human-review routing</a:t>
+            </a:r>
+            <a:endParaRPr lang="en-US" sz="1500" dirty="0"/>
+          </a:p>
+        </p:txBody>
+      </p:sp>
+      <p:sp>
+        <p:nvSpPr>
+          <p:cNvPr id="27" name="Text 25"/>
+          <p:cNvSpPr/>
+          <p:nvPr/>
+        </p:nvSpPr>
+        <p:spPr>
+          <a:xfrm>
+            <a:off x="4594250" y="4681728"/>
+            <a:ext cx="3012338" cy="1335024"/>
+          </a:xfrm>
+          <a:prstGeom prst="rect">
+            <a:avLst/>
+          </a:prstGeom>
+          <a:noFill/>
+          <a:ln/>
+        </p:spPr>
+        <p:txBody>
+          <a:bodyPr wrap="square" lIns="0" tIns="0" rIns="0" bIns="0" rtlCol="0" anchor="t"/>
+          <a:lstStyle/>
+          <a:p>
+            <a:pPr algn="l" indent="0" marL="0">
+              <a:lnSpc>
+                <a:spcPct val="106000"/>
+              </a:lnSpc>
+              <a:spcAft>
+                <a:spcPts val="300"/>
+              </a:spcAft>
+              <a:buNone/>
+            </a:pPr>
+            <a:r>
+              <a:rPr lang="en-US" sz="1250" dirty="0">
+                <a:solidFill>
+                  <a:srgbClr val="536177"/>
+                </a:solidFill>
+                <a:latin typeface="Calibri" pitchFamily="34" charset="0"/>
+                <a:ea typeface="Calibri" pitchFamily="34" charset="-122"/>
+                <a:cs typeface="Calibri" pitchFamily="34" charset="-120"/>
+              </a:rPr>
+              <a:t>Below the confidence threshold → human_review_required; output can't be used until a reviewer signs off.</a:t>
+            </a:r>
+            <a:endParaRPr lang="en-US" sz="1250" dirty="0"/>
+          </a:p>
+        </p:txBody>
+      </p:sp>
+      <p:sp>
+        <p:nvSpPr>
+          <p:cNvPr id="28" name="Shape 26"/>
+          <p:cNvSpPr/>
+          <p:nvPr/>
+        </p:nvSpPr>
+        <p:spPr>
+          <a:xfrm>
+            <a:off x="8036357" y="4059936"/>
+            <a:ext cx="3515258" cy="2066544"/>
+          </a:xfrm>
+          <a:prstGeom prst="roundRect">
+            <a:avLst>
+              <a:gd name="adj" fmla="val 2212"/>
+            </a:avLst>
+          </a:prstGeom>
+          <a:solidFill>
+            <a:srgbClr val="F4F7FB"/>
+          </a:solidFill>
+          <a:ln w="12700">
+            <a:solidFill>
+              <a:srgbClr val="DDE4EE"/>
+            </a:solidFill>
+            <a:prstDash val="solid"/>
+          </a:ln>
+          <a:effectLst>
+            <a:outerShdw sx="100000" sy="100000" kx="0" ky="0" algn="bl" rotWithShape="0" blurRad="88900" dist="38100" dir="5400000">
+              <a:srgbClr val="1B2A4A">
+                <a:alpha val="12000"/>
+              </a:srgbClr>
+            </a:outerShdw>
+          </a:effectLst>
+        </p:spPr>
+      </p:sp>
+      <p:sp>
+        <p:nvSpPr>
+          <p:cNvPr id="29" name="Shape 27"/>
+          <p:cNvSpPr/>
+          <p:nvPr/>
+        </p:nvSpPr>
+        <p:spPr>
+          <a:xfrm>
+            <a:off x="8036357" y="4059936"/>
+            <a:ext cx="82296" cy="2066544"/>
+          </a:xfrm>
+          <a:prstGeom prst="rect">
+            <a:avLst/>
+          </a:prstGeom>
+          <a:solidFill>
+            <a:srgbClr val="2B59D6"/>
+          </a:solidFill>
+          <a:ln/>
+        </p:spPr>
+      </p:sp>
+      <p:sp>
+        <p:nvSpPr>
+          <p:cNvPr id="30" name="Text 28"/>
+          <p:cNvSpPr/>
+          <p:nvPr/>
+        </p:nvSpPr>
+        <p:spPr>
+          <a:xfrm>
+            <a:off x="8292389" y="4261104"/>
+            <a:ext cx="3058058" cy="365760"/>
+          </a:xfrm>
+          <a:prstGeom prst="rect">
+            <a:avLst/>
+          </a:prstGeom>
+          <a:noFill/>
+          <a:ln/>
+        </p:spPr>
+        <p:txBody>
+          <a:bodyPr wrap="square" lIns="0" tIns="0" rIns="0" bIns="0" rtlCol="0" anchor="t"/>
+          <a:lstStyle/>
+          <a:p>
+            <a:pPr algn="l" indent="0" marL="0">
+              <a:lnSpc>
+                <a:spcPct val="100000"/>
+              </a:lnSpc>
+              <a:buNone/>
+            </a:pPr>
+            <a:r>
+              <a:rPr lang="en-US" sz="1500" b="1" dirty="0">
+                <a:solidFill>
+                  <a:srgbClr val="1B2A4A"/>
+                </a:solidFill>
+                <a:latin typeface="Calibri" pitchFamily="34" charset="0"/>
+                <a:ea typeface="Calibri" pitchFamily="34" charset="-122"/>
+                <a:cs typeface="Calibri" pitchFamily="34" charset="-120"/>
+              </a:rPr>
+              <a:t>Model-risk class</a:t>
+            </a:r>
+            <a:endParaRPr lang="en-US" sz="1500" dirty="0"/>
+          </a:p>
+        </p:txBody>
+      </p:sp>
+      <p:sp>
+        <p:nvSpPr>
+          <p:cNvPr id="31" name="Text 29"/>
+          <p:cNvSpPr/>
+          <p:nvPr/>
+        </p:nvSpPr>
+        <p:spPr>
+          <a:xfrm>
+            <a:off x="8292389" y="4681728"/>
+            <a:ext cx="3012338" cy="1335024"/>
+          </a:xfrm>
+          <a:prstGeom prst="rect">
+            <a:avLst/>
+          </a:prstGeom>
+          <a:noFill/>
+          <a:ln/>
+        </p:spPr>
+        <p:txBody>
+          <a:bodyPr wrap="square" lIns="0" tIns="0" rIns="0" bIns="0" rtlCol="0" anchor="t"/>
+          <a:lstStyle/>
+          <a:p>
+            <a:pPr algn="l" indent="0" marL="0">
+              <a:lnSpc>
+                <a:spcPct val="106000"/>
+              </a:lnSpc>
+              <a:spcAft>
+                <a:spcPts val="300"/>
+              </a:spcAft>
+              <a:buNone/>
+            </a:pPr>
+            <a:r>
+              <a:rPr lang="en-US" sz="1250" dirty="0">
+                <a:solidFill>
+                  <a:srgbClr val="536177"/>
+                </a:solidFill>
+                <a:latin typeface="Calibri" pitchFamily="34" charset="0"/>
+                <a:ea typeface="Calibri" pitchFamily="34" charset="-122"/>
+                <a:cs typeface="Calibri" pitchFamily="34" charset="-120"/>
+              </a:rPr>
+              <a:t>Decision-support tier, zero autonomy — outputs are inputs, never actions.</a:t>
             </a:r>
             <a:endParaRPr lang="en-US" sz="1250" dirty="0"/>
           </a:p>
@@ -8462,7 +9095,7 @@
     <p:bg>
       <p:bgPr>
         <a:solidFill>
-          <a:srgbClr val="1B2A4A"/>
+          <a:srgbClr val="FFFFFF"/>
         </a:solidFill>
       </p:bgPr>
     </p:bg>
@@ -8495,6 +9128,110 @@
             <a:avLst/>
           </a:prstGeom>
           <a:solidFill>
+            <a:srgbClr val="2B59D6"/>
+          </a:solidFill>
+          <a:ln/>
+        </p:spPr>
+      </p:sp>
+      <p:sp>
+        <p:nvSpPr>
+          <p:cNvPr id="3" name="Text 1"/>
+          <p:cNvSpPr/>
+          <p:nvPr/>
+        </p:nvSpPr>
+        <p:spPr>
+          <a:xfrm>
+            <a:off x="640080" y="384048"/>
+            <a:ext cx="10789920" cy="274320"/>
+          </a:xfrm>
+          <a:prstGeom prst="rect">
+            <a:avLst/>
+          </a:prstGeom>
+          <a:noFill/>
+          <a:ln/>
+        </p:spPr>
+        <p:txBody>
+          <a:bodyPr wrap="square" lIns="0" tIns="0" rIns="0" bIns="0" rtlCol="0" anchor="t"/>
+          <a:lstStyle/>
+          <a:p>
+            <a:pPr algn="l" indent="0" marL="0">
+              <a:lnSpc>
+                <a:spcPct val="100000"/>
+              </a:lnSpc>
+              <a:buNone/>
+            </a:pPr>
+            <a:r>
+              <a:rPr lang="en-US" sz="1200" b="1" dirty="0">
+                <a:solidFill>
+                  <a:srgbClr val="129E8F"/>
+                </a:solidFill>
+                <a:latin typeface="Calibri" pitchFamily="34" charset="0"/>
+                <a:ea typeface="Calibri" pitchFamily="34" charset="-122"/>
+                <a:cs typeface="Calibri" pitchFamily="34" charset="-120"/>
+              </a:rPr>
+              <a:t>WHAT WE BUILT — THE DASHBOARD</a:t>
+            </a:r>
+            <a:endParaRPr lang="en-US" sz="1200" dirty="0"/>
+          </a:p>
+        </p:txBody>
+      </p:sp>
+      <p:sp>
+        <p:nvSpPr>
+          <p:cNvPr id="4" name="Text 2"/>
+          <p:cNvSpPr/>
+          <p:nvPr/>
+        </p:nvSpPr>
+        <p:spPr>
+          <a:xfrm>
+            <a:off x="640080" y="658368"/>
+            <a:ext cx="10881360" cy="822960"/>
+          </a:xfrm>
+          <a:prstGeom prst="rect">
+            <a:avLst/>
+          </a:prstGeom>
+          <a:noFill/>
+          <a:ln/>
+        </p:spPr>
+        <p:txBody>
+          <a:bodyPr wrap="square" lIns="0" tIns="0" rIns="0" bIns="0" rtlCol="0" anchor="t"/>
+          <a:lstStyle/>
+          <a:p>
+            <a:pPr algn="l" indent="0" marL="0">
+              <a:lnSpc>
+                <a:spcPct val="100000"/>
+              </a:lnSpc>
+              <a:buNone/>
+            </a:pPr>
+            <a:r>
+              <a:rPr lang="en-US" sz="2800" b="1" dirty="0">
+                <a:solidFill>
+                  <a:srgbClr val="1B2A4A"/>
+                </a:solidFill>
+                <a:latin typeface="Calibri" pitchFamily="34" charset="0"/>
+                <a:ea typeface="Calibri" pitchFamily="34" charset="-122"/>
+                <a:cs typeface="Calibri" pitchFamily="34" charset="-120"/>
+              </a:rPr>
+              <a:t>Two layers, one product</a:t>
+            </a:r>
+            <a:endParaRPr lang="en-US" sz="2800" dirty="0"/>
+          </a:p>
+        </p:txBody>
+      </p:sp>
+      <p:sp>
+        <p:nvSpPr>
+          <p:cNvPr id="5" name="Shape 3"/>
+          <p:cNvSpPr/>
+          <p:nvPr/>
+        </p:nvSpPr>
+        <p:spPr>
+          <a:xfrm>
+            <a:off x="658368" y="1335024"/>
+            <a:ext cx="548640" cy="36576"/>
+          </a:xfrm>
+          <a:prstGeom prst="rect">
+            <a:avLst/>
+          </a:prstGeom>
+          <a:solidFill>
             <a:srgbClr val="129E8F"/>
           </a:solidFill>
           <a:ln/>
@@ -8502,14 +9239,14 @@
       </p:sp>
       <p:sp>
         <p:nvSpPr>
-          <p:cNvPr id="3" name="Text 1"/>
-          <p:cNvSpPr/>
-          <p:nvPr/>
-        </p:nvSpPr>
-        <p:spPr>
-          <a:xfrm>
-            <a:off x="868680" y="2468880"/>
-            <a:ext cx="10058400" cy="365760"/>
+          <p:cNvPr id="6" name="Text 4"/>
+          <p:cNvSpPr/>
+          <p:nvPr/>
+        </p:nvSpPr>
+        <p:spPr>
+          <a:xfrm>
+            <a:off x="640080" y="6437376"/>
+            <a:ext cx="7315200" cy="274320"/>
           </a:xfrm>
           <a:prstGeom prst="rect">
             <a:avLst/>
@@ -8528,30 +9265,47 @@
               <a:buNone/>
             </a:pPr>
             <a:r>
-              <a:rPr lang="en-US" sz="1300" b="1" dirty="0">
-                <a:solidFill>
-                  <a:srgbClr val="129E8F"/>
-                </a:solidFill>
-                <a:latin typeface="Calibri" pitchFamily="34" charset="0"/>
-                <a:ea typeface="Calibri" pitchFamily="34" charset="-122"/>
-                <a:cs typeface="Calibri" pitchFamily="34" charset="-120"/>
-              </a:rPr>
-              <a:t>WHY IT ANSWERS THE CHALLENGE</a:t>
-            </a:r>
-            <a:endParaRPr lang="en-US" sz="1300" dirty="0"/>
-          </a:p>
-        </p:txBody>
-      </p:sp>
-      <p:sp>
-        <p:nvSpPr>
-          <p:cNvPr id="4" name="Text 2"/>
-          <p:cNvSpPr/>
-          <p:nvPr/>
-        </p:nvSpPr>
-        <p:spPr>
-          <a:xfrm>
-            <a:off x="841248" y="2880360"/>
-            <a:ext cx="10424160" cy="1097280"/>
+              <a:rPr lang="en-US" sz="900" b="1" dirty="0">
+                <a:solidFill>
+                  <a:srgbClr val="536177"/>
+                </a:solidFill>
+                <a:latin typeface="Calibri" pitchFamily="34" charset="0"/>
+                <a:ea typeface="Calibri" pitchFamily="34" charset="-122"/>
+                <a:cs typeface="Calibri" pitchFamily="34" charset="-120"/>
+              </a:rPr>
+              <a:t>LoanWhiz</a:t>
+            </a:r>
+            <a:pPr algn="l" indent="0" marL="0">
+              <a:lnSpc>
+                <a:spcPct val="100000"/>
+              </a:lnSpc>
+              <a:buNone/>
+            </a:pPr>
+            <a:r>
+              <a:rPr lang="en-US" sz="900" dirty="0">
+                <a:solidFill>
+                  <a:srgbClr val="6B7A90"/>
+                </a:solidFill>
+                <a:latin typeface="Calibri" pitchFamily="34" charset="0"/>
+                <a:ea typeface="Calibri" pitchFamily="34" charset="-122"/>
+                <a:cs typeface="Calibri" pitchFamily="34" charset="-120"/>
+              </a:rPr>
+              <a:t>  ·  Structured Finance Agent Framework</a:t>
+            </a:r>
+            <a:endParaRPr lang="en-US" sz="900" dirty="0"/>
+          </a:p>
+        </p:txBody>
+      </p:sp>
+      <p:sp>
+        <p:nvSpPr>
+          <p:cNvPr id="7" name="Text 5"/>
+          <p:cNvSpPr/>
+          <p:nvPr/>
+        </p:nvSpPr>
+        <p:spPr>
+          <a:xfrm>
+            <a:off x="10058400" y="6437376"/>
+            <a:ext cx="502920" cy="274320"/>
           </a:xfrm>
           <a:prstGeom prst="rect">
             <a:avLst/>
@@ -8563,6 +9317,102 @@
           <a:bodyPr wrap="square" lIns="0" tIns="0" rIns="0" bIns="0" rtlCol="0" anchor="t"/>
           <a:lstStyle/>
           <a:p>
+            <a:pPr algn="r" indent="0" marL="0">
+              <a:lnSpc>
+                <a:spcPct val="100000"/>
+              </a:lnSpc>
+              <a:buNone/>
+            </a:pPr>
+            <a:r>
+              <a:rPr lang="en-US" sz="900" dirty="0">
+                <a:solidFill>
+                  <a:srgbClr val="6B7A90"/>
+                </a:solidFill>
+                <a:latin typeface="Calibri" pitchFamily="34" charset="0"/>
+                <a:ea typeface="Calibri" pitchFamily="34" charset="-122"/>
+                <a:cs typeface="Calibri" pitchFamily="34" charset="-120"/>
+              </a:rPr>
+              <a:t>09</a:t>
+            </a:r>
+            <a:endParaRPr lang="en-US" sz="900" dirty="0"/>
+          </a:p>
+        </p:txBody>
+      </p:sp>
+      <p:sp>
+        <p:nvSpPr>
+          <p:cNvPr id="8" name="Shape 6"/>
+          <p:cNvSpPr/>
+          <p:nvPr/>
+        </p:nvSpPr>
+        <p:spPr>
+          <a:xfrm>
+            <a:off x="640080" y="1828800"/>
+            <a:ext cx="5364328" cy="4297680"/>
+          </a:xfrm>
+          <a:prstGeom prst="roundRect">
+            <a:avLst>
+              <a:gd name="adj" fmla="val 1064"/>
+            </a:avLst>
+          </a:prstGeom>
+          <a:solidFill>
+            <a:srgbClr val="F4F7FB"/>
+          </a:solidFill>
+          <a:ln w="12700">
+            <a:solidFill>
+              <a:srgbClr val="DDE4EE"/>
+            </a:solidFill>
+            <a:prstDash val="solid"/>
+          </a:ln>
+          <a:effectLst>
+            <a:outerShdw sx="100000" sy="100000" kx="0" ky="0" algn="bl" rotWithShape="0" blurRad="88900" dist="38100" dir="5400000">
+              <a:srgbClr val="1B2A4A">
+                <a:alpha val="12000"/>
+              </a:srgbClr>
+            </a:outerShdw>
+          </a:effectLst>
+        </p:spPr>
+      </p:sp>
+      <p:sp>
+        <p:nvSpPr>
+          <p:cNvPr id="9" name="Shape 7"/>
+          <p:cNvSpPr/>
+          <p:nvPr/>
+        </p:nvSpPr>
+        <p:spPr>
+          <a:xfrm>
+            <a:off x="640080" y="1828800"/>
+            <a:ext cx="82296" cy="4297680"/>
+          </a:xfrm>
+          <a:prstGeom prst="rect">
+            <a:avLst/>
+          </a:prstGeom>
+          <a:solidFill>
+            <a:srgbClr val="1B2A4A"/>
+          </a:solidFill>
+          <a:ln/>
+        </p:spPr>
+      </p:sp>
+      <p:sp>
+        <p:nvSpPr>
+          <p:cNvPr id="10" name="Text 8"/>
+          <p:cNvSpPr/>
+          <p:nvPr/>
+        </p:nvSpPr>
+        <p:spPr>
+          <a:xfrm>
+            <a:off x="896112" y="2029968"/>
+            <a:ext cx="4907128" cy="365760"/>
+          </a:xfrm>
+          <a:prstGeom prst="rect">
+            <a:avLst/>
+          </a:prstGeom>
+          <a:noFill/>
+          <a:ln/>
+        </p:spPr>
+        <p:txBody>
+          <a:bodyPr wrap="square" lIns="0" tIns="0" rIns="0" bIns="0" rtlCol="0" anchor="t"/>
+          <a:lstStyle/>
+          <a:p>
             <a:pPr algn="l" indent="0" marL="0">
               <a:lnSpc>
                 <a:spcPct val="100000"/>
@@ -8570,30 +9420,30 @@
               <a:buNone/>
             </a:pPr>
             <a:r>
-              <a:rPr lang="en-US" sz="4000" b="1" dirty="0">
-                <a:solidFill>
-                  <a:srgbClr val="FFFFFF"/>
-                </a:solidFill>
-                <a:latin typeface="Calibri" pitchFamily="34" charset="0"/>
-                <a:ea typeface="Calibri" pitchFamily="34" charset="-122"/>
-                <a:cs typeface="Calibri" pitchFamily="34" charset="-120"/>
-              </a:rPr>
-              <a:t>Reusable, trustworthy, broadly applicable</a:t>
-            </a:r>
-            <a:endParaRPr lang="en-US" sz="4000" dirty="0"/>
-          </a:p>
-        </p:txBody>
-      </p:sp>
-      <p:sp>
-        <p:nvSpPr>
-          <p:cNvPr id="5" name="Text 3"/>
-          <p:cNvSpPr/>
-          <p:nvPr/>
-        </p:nvSpPr>
-        <p:spPr>
-          <a:xfrm>
-            <a:off x="868680" y="3977640"/>
-            <a:ext cx="9875520" cy="1097280"/>
+              <a:rPr lang="en-US" sz="1500" b="1" dirty="0">
+                <a:solidFill>
+                  <a:srgbClr val="1B2A4A"/>
+                </a:solidFill>
+                <a:latin typeface="Calibri" pitchFamily="34" charset="0"/>
+                <a:ea typeface="Calibri" pitchFamily="34" charset="-122"/>
+                <a:cs typeface="Calibri" pitchFamily="34" charset="-120"/>
+              </a:rPr>
+              <a:t>Deal Analytics</a:t>
+            </a:r>
+            <a:endParaRPr lang="en-US" sz="1500" dirty="0"/>
+          </a:p>
+        </p:txBody>
+      </p:sp>
+      <p:sp>
+        <p:nvSpPr>
+          <p:cNvPr id="11" name="Text 9"/>
+          <p:cNvSpPr/>
+          <p:nvPr/>
+        </p:nvSpPr>
+        <p:spPr>
+          <a:xfrm>
+            <a:off x="896112" y="2450592"/>
+            <a:ext cx="4861408" cy="3566160"/>
           </a:xfrm>
           <a:prstGeom prst="rect">
             <a:avLst/>
@@ -8607,22 +9457,166 @@
           <a:p>
             <a:pPr algn="l" indent="0" marL="0">
               <a:lnSpc>
-                <a:spcPct val="120000"/>
-              </a:lnSpc>
-              <a:buNone/>
-            </a:pPr>
-            <a:r>
-              <a:rPr lang="en-US" sz="1600" dirty="0">
-                <a:solidFill>
-                  <a:srgbClr val="C7D3E8"/>
-                </a:solidFill>
-                <a:latin typeface="Calibri" pitchFamily="34" charset="0"/>
-                <a:ea typeface="Calibri" pitchFamily="34" charset="-122"/>
-                <a:cs typeface="Calibri" pitchFamily="34" charset="-120"/>
-              </a:rPr>
-              <a:t>SF-native primitives + a registry, packaged as an MCP — not a one-off script. Validated to the cent against a real ING deal, demonstrated across Dutch, Italian and Spanish RMBS, with citations, governance and data-provenance on every output. And honest about its limits — the capability matrix shows exactly what's proven.</a:t>
-            </a:r>
-            <a:endParaRPr lang="en-US" sz="1600" dirty="0"/>
+                <a:spcPct val="106000"/>
+              </a:lnSpc>
+              <a:spcAft>
+                <a:spcPts val="300"/>
+              </a:spcAft>
+              <a:buNone/>
+            </a:pPr>
+            <a:r>
+              <a:rPr lang="en-US" sz="1250" dirty="0">
+                <a:solidFill>
+                  <a:srgbClr val="536177"/>
+                </a:solidFill>
+                <a:latin typeface="Calibri" pitchFamily="34" charset="0"/>
+                <a:ea typeface="Calibri" pitchFamily="34" charset="-122"/>
+                <a:cs typeface="Calibri" pitchFamily="34" charset="-120"/>
+              </a:rPr>
+              <a:t>Overview · Pool &amp; Performance · Waterfall · Compliance · Projection — the per-deal analyst workflow over the extracted model.</a:t>
+            </a:r>
+            <a:endParaRPr lang="en-US" sz="1250" dirty="0"/>
+          </a:p>
+        </p:txBody>
+      </p:sp>
+      <p:sp>
+        <p:nvSpPr>
+          <p:cNvPr id="12" name="Shape 10"/>
+          <p:cNvSpPr/>
+          <p:nvPr/>
+        </p:nvSpPr>
+        <p:spPr>
+          <a:xfrm>
+            <a:off x="6187288" y="1828800"/>
+            <a:ext cx="5364328" cy="4297680"/>
+          </a:xfrm>
+          <a:prstGeom prst="roundRect">
+            <a:avLst>
+              <a:gd name="adj" fmla="val 1064"/>
+            </a:avLst>
+          </a:prstGeom>
+          <a:solidFill>
+            <a:srgbClr val="F4F7FB"/>
+          </a:solidFill>
+          <a:ln w="12700">
+            <a:solidFill>
+              <a:srgbClr val="DDE4EE"/>
+            </a:solidFill>
+            <a:prstDash val="solid"/>
+          </a:ln>
+          <a:effectLst>
+            <a:outerShdw sx="100000" sy="100000" kx="0" ky="0" algn="bl" rotWithShape="0" blurRad="88900" dist="38100" dir="5400000">
+              <a:srgbClr val="1B2A4A">
+                <a:alpha val="12000"/>
+              </a:srgbClr>
+            </a:outerShdw>
+          </a:effectLst>
+        </p:spPr>
+      </p:sp>
+      <p:sp>
+        <p:nvSpPr>
+          <p:cNvPr id="13" name="Shape 11"/>
+          <p:cNvSpPr/>
+          <p:nvPr/>
+        </p:nvSpPr>
+        <p:spPr>
+          <a:xfrm>
+            <a:off x="6187288" y="1828800"/>
+            <a:ext cx="82296" cy="4297680"/>
+          </a:xfrm>
+          <a:prstGeom prst="rect">
+            <a:avLst/>
+          </a:prstGeom>
+          <a:solidFill>
+            <a:srgbClr val="2B59D6"/>
+          </a:solidFill>
+          <a:ln/>
+        </p:spPr>
+      </p:sp>
+      <p:sp>
+        <p:nvSpPr>
+          <p:cNvPr id="14" name="Text 12"/>
+          <p:cNvSpPr/>
+          <p:nvPr/>
+        </p:nvSpPr>
+        <p:spPr>
+          <a:xfrm>
+            <a:off x="6443320" y="2029968"/>
+            <a:ext cx="4907128" cy="365760"/>
+          </a:xfrm>
+          <a:prstGeom prst="rect">
+            <a:avLst/>
+          </a:prstGeom>
+          <a:noFill/>
+          <a:ln/>
+        </p:spPr>
+        <p:txBody>
+          <a:bodyPr wrap="square" lIns="0" tIns="0" rIns="0" bIns="0" rtlCol="0" anchor="t"/>
+          <a:lstStyle/>
+          <a:p>
+            <a:pPr algn="l" indent="0" marL="0">
+              <a:lnSpc>
+                <a:spcPct val="100000"/>
+              </a:lnSpc>
+              <a:buNone/>
+            </a:pPr>
+            <a:r>
+              <a:rPr lang="en-US" sz="1500" b="1" dirty="0">
+                <a:solidFill>
+                  <a:srgbClr val="1B2A4A"/>
+                </a:solidFill>
+                <a:latin typeface="Calibri" pitchFamily="34" charset="0"/>
+                <a:ea typeface="Calibri" pitchFamily="34" charset="-122"/>
+                <a:cs typeface="Calibri" pitchFamily="34" charset="-120"/>
+              </a:rPr>
+              <a:t>Platform &amp; Governance</a:t>
+            </a:r>
+            <a:endParaRPr lang="en-US" sz="1500" dirty="0"/>
+          </a:p>
+        </p:txBody>
+      </p:sp>
+      <p:sp>
+        <p:nvSpPr>
+          <p:cNvPr id="15" name="Text 13"/>
+          <p:cNvSpPr/>
+          <p:nvPr/>
+        </p:nvSpPr>
+        <p:spPr>
+          <a:xfrm>
+            <a:off x="6443320" y="2450592"/>
+            <a:ext cx="4861408" cy="3566160"/>
+          </a:xfrm>
+          <a:prstGeom prst="rect">
+            <a:avLst/>
+          </a:prstGeom>
+          <a:noFill/>
+          <a:ln/>
+        </p:spPr>
+        <p:txBody>
+          <a:bodyPr wrap="square" lIns="0" tIns="0" rIns="0" bIns="0" rtlCol="0" anchor="t"/>
+          <a:lstStyle/>
+          <a:p>
+            <a:pPr algn="l" indent="0" marL="0">
+              <a:lnSpc>
+                <a:spcPct val="106000"/>
+              </a:lnSpc>
+              <a:spcAft>
+                <a:spcPts val="300"/>
+              </a:spcAft>
+              <a:buNone/>
+            </a:pPr>
+            <a:r>
+              <a:rPr lang="en-US" sz="1250" dirty="0">
+                <a:solidFill>
+                  <a:srgbClr val="536177"/>
+                </a:solidFill>
+                <a:latin typeface="Calibri" pitchFamily="34" charset="0"/>
+                <a:ea typeface="Calibri" pitchFamily="34" charset="-122"/>
+                <a:cs typeface="Calibri" pitchFamily="34" charset="-120"/>
+              </a:rPr>
+              <a:t>Showcase · Validation · Framework · Governance — the cross-deal, trust &amp; reusability layer that headlines the work.</a:t>
+            </a:r>
+            <a:endParaRPr lang="en-US" sz="1250" dirty="0"/>
           </a:p>
         </p:txBody>
       </p:sp>
